--- a/docs/AUCA_Mentorship_Portal.pptx
+++ b/docs/AUCA_Mentorship_Portal.pptx
@@ -15,8 +15,11 @@
     <p:sldId id="263" r:id="rId9"/>
     <p:sldId id="264" r:id="rId10"/>
     <p:sldId id="265" r:id="rId11"/>
-    <p:sldId id="266" r:id="rId12"/>
-    <p:sldId id="268" r:id="rId13"/>
+    <p:sldId id="267" r:id="rId12"/>
+    <p:sldId id="266" r:id="rId13"/>
+    <p:sldId id="269" r:id="rId14"/>
+    <p:sldId id="270" r:id="rId15"/>
+    <p:sldId id="268" r:id="rId16"/>
   </p:sldIdLst>
   <p:sldSz cx="12188825" cy="6858000"/>
   <p:notesSz cx="6858000" cy="9144000"/>
@@ -3212,7 +3215,7 @@
           <a:p>
             <a:pPr algn="r"/>
             <a:r>
-              <a:rPr sz="900" b="0" i="0">
+              <a:rPr sz="900" b="0" i="0" dirty="0">
                 <a:solidFill>
                   <a:srgbClr val="AABBCC"/>
                 </a:solidFill>
@@ -3431,7 +3434,7 @@
           <a:p>
             <a:pPr algn="l"/>
             <a:r>
-              <a:rPr sz="1100" b="0" i="0">
+              <a:rPr sz="1100" b="0" i="0" dirty="0">
                 <a:solidFill>
                   <a:srgbClr val="AABBCC"/>
                 </a:solidFill>
@@ -4134,7 +4137,7 @@
           <a:p>
             <a:pPr algn="l"/>
             <a:r>
-              <a:rPr sz="1300" b="1" i="0">
+              <a:rPr sz="1300" b="1" i="0" dirty="0">
                 <a:solidFill>
                   <a:srgbClr val="FFFFFF"/>
                 </a:solidFill>
@@ -4414,41 +4417,6 @@
           <a:p>
             <a:pPr algn="ctr"/>
             <a:endParaRPr/>
-          </a:p>
-        </p:txBody>
-      </p:sp>
-      <p:sp>
-        <p:nvSpPr>
-          <p:cNvPr id="19" name="TextBox 18"/>
-          <p:cNvSpPr txBox="1"/>
-          <p:nvPr/>
-        </p:nvSpPr>
-        <p:spPr>
-          <a:xfrm>
-            <a:off x="6419088" y="2889504"/>
-            <a:ext cx="5120640" cy="320040"/>
-          </a:xfrm>
-          <a:prstGeom prst="rect">
-            <a:avLst/>
-          </a:prstGeom>
-          <a:noFill/>
-        </p:spPr>
-        <p:txBody>
-          <a:bodyPr wrap="square">
-            <a:spAutoFit/>
-          </a:bodyPr>
-          <a:lstStyle/>
-          <a:p>
-            <a:pPr algn="l"/>
-            <a:r>
-              <a:rPr sz="1000" b="1" i="0">
-                <a:solidFill>
-                  <a:srgbClr val="0D1B2A"/>
-                </a:solidFill>
-                <a:latin typeface="Calibri"/>
-              </a:rPr>
-              <a:t>feature/mentors</a:t>
-            </a:r>
           </a:p>
         </p:txBody>
       </p:sp>
@@ -5066,6 +5034,3056 @@
 </file>
 
 <file path=ppt/slides/slide11.xml><?xml version="1.0" encoding="utf-8"?>
+<p:sld xmlns:a="http://schemas.openxmlformats.org/drawingml/2006/main" xmlns:r="http://schemas.openxmlformats.org/officeDocument/2006/relationships" xmlns:p="http://schemas.openxmlformats.org/presentationml/2006/main">
+  <p:cSld>
+    <p:spTree>
+      <p:nvGrpSpPr>
+        <p:cNvPr id="1" name=""/>
+        <p:cNvGrpSpPr/>
+        <p:nvPr/>
+      </p:nvGrpSpPr>
+      <p:grpSpPr>
+        <a:xfrm>
+          <a:off x="0" y="0"/>
+          <a:ext cx="0" cy="0"/>
+          <a:chOff x="0" y="0"/>
+          <a:chExt cx="0" cy="0"/>
+        </a:xfrm>
+      </p:grpSpPr>
+      <p:sp>
+        <p:nvSpPr>
+          <p:cNvPr id="2" name="Rectangle 1"/>
+          <p:cNvSpPr/>
+          <p:nvPr/>
+        </p:nvSpPr>
+        <p:spPr>
+          <a:xfrm>
+            <a:off x="0" y="0"/>
+            <a:ext cx="12188952" cy="1097280"/>
+          </a:xfrm>
+          <a:prstGeom prst="rect">
+            <a:avLst/>
+          </a:prstGeom>
+          <a:solidFill>
+            <a:srgbClr val="0D1B2A"/>
+          </a:solidFill>
+          <a:ln>
+            <a:noFill/>
+          </a:ln>
+        </p:spPr>
+        <p:style>
+          <a:lnRef idx="1">
+            <a:schemeClr val="accent1"/>
+          </a:lnRef>
+          <a:fillRef idx="3">
+            <a:schemeClr val="accent1"/>
+          </a:fillRef>
+          <a:effectRef idx="2">
+            <a:schemeClr val="accent1"/>
+          </a:effectRef>
+          <a:fontRef idx="minor">
+            <a:schemeClr val="lt1"/>
+          </a:fontRef>
+        </p:style>
+        <p:txBody>
+          <a:bodyPr rtlCol="0" anchor="ctr"/>
+          <a:lstStyle/>
+          <a:p>
+            <a:pPr algn="ctr"/>
+            <a:endParaRPr/>
+          </a:p>
+        </p:txBody>
+      </p:sp>
+      <p:sp>
+        <p:nvSpPr>
+          <p:cNvPr id="3" name="TextBox 2"/>
+          <p:cNvSpPr txBox="1"/>
+          <p:nvPr/>
+        </p:nvSpPr>
+        <p:spPr>
+          <a:xfrm>
+            <a:off x="457200" y="292608"/>
+            <a:ext cx="10972800" cy="461665"/>
+          </a:xfrm>
+          <a:prstGeom prst="rect">
+            <a:avLst/>
+          </a:prstGeom>
+          <a:noFill/>
+        </p:spPr>
+        <p:txBody>
+          <a:bodyPr wrap="square">
+            <a:spAutoFit/>
+          </a:bodyPr>
+          <a:lstStyle/>
+          <a:p>
+            <a:pPr algn="l"/>
+            <a:r>
+              <a:rPr sz="2400" b="1" i="0">
+                <a:solidFill>
+                  <a:srgbClr val="FFFFFF"/>
+                </a:solidFill>
+                <a:latin typeface="Georgia"/>
+              </a:rPr>
+              <a:t>Phase 4 · API Testing Postman Collection</a:t>
+            </a:r>
+          </a:p>
+        </p:txBody>
+      </p:sp>
+      <p:sp>
+        <p:nvSpPr>
+          <p:cNvPr id="4" name="Rectangle 3"/>
+          <p:cNvSpPr/>
+          <p:nvPr/>
+        </p:nvSpPr>
+        <p:spPr>
+          <a:xfrm>
+            <a:off x="365760" y="1170432"/>
+            <a:ext cx="11430000" cy="384048"/>
+          </a:xfrm>
+          <a:prstGeom prst="rect">
+            <a:avLst/>
+          </a:prstGeom>
+          <a:solidFill>
+            <a:srgbClr val="0D1B2A"/>
+          </a:solidFill>
+          <a:ln w="6350">
+            <a:solidFill>
+              <a:srgbClr val="E0E0E0"/>
+            </a:solidFill>
+          </a:ln>
+        </p:spPr>
+        <p:style>
+          <a:lnRef idx="1">
+            <a:schemeClr val="accent1"/>
+          </a:lnRef>
+          <a:fillRef idx="3">
+            <a:schemeClr val="accent1"/>
+          </a:fillRef>
+          <a:effectRef idx="2">
+            <a:schemeClr val="accent1"/>
+          </a:effectRef>
+          <a:fontRef idx="minor">
+            <a:schemeClr val="lt1"/>
+          </a:fontRef>
+        </p:style>
+        <p:txBody>
+          <a:bodyPr rtlCol="0" anchor="ctr"/>
+          <a:lstStyle/>
+          <a:p>
+            <a:pPr algn="ctr"/>
+            <a:endParaRPr/>
+          </a:p>
+        </p:txBody>
+      </p:sp>
+      <p:sp>
+        <p:nvSpPr>
+          <p:cNvPr id="5" name="TextBox 4"/>
+          <p:cNvSpPr txBox="1"/>
+          <p:nvPr/>
+        </p:nvSpPr>
+        <p:spPr>
+          <a:xfrm>
+            <a:off x="457200" y="1188720"/>
+            <a:ext cx="1005840" cy="347472"/>
+          </a:xfrm>
+          <a:prstGeom prst="rect">
+            <a:avLst/>
+          </a:prstGeom>
+          <a:noFill/>
+        </p:spPr>
+        <p:txBody>
+          <a:bodyPr wrap="square">
+            <a:spAutoFit/>
+          </a:bodyPr>
+          <a:lstStyle/>
+          <a:p>
+            <a:pPr algn="l"/>
+            <a:r>
+              <a:rPr sz="1000" b="1" i="0">
+                <a:solidFill>
+                  <a:srgbClr val="C9A84C"/>
+                </a:solidFill>
+                <a:latin typeface="Calibri"/>
+              </a:rPr>
+              <a:t>Method</a:t>
+            </a:r>
+          </a:p>
+        </p:txBody>
+      </p:sp>
+      <p:sp>
+        <p:nvSpPr>
+          <p:cNvPr id="6" name="TextBox 5"/>
+          <p:cNvSpPr txBox="1"/>
+          <p:nvPr/>
+        </p:nvSpPr>
+        <p:spPr>
+          <a:xfrm>
+            <a:off x="1463040" y="1188720"/>
+            <a:ext cx="4114800" cy="347472"/>
+          </a:xfrm>
+          <a:prstGeom prst="rect">
+            <a:avLst/>
+          </a:prstGeom>
+          <a:noFill/>
+        </p:spPr>
+        <p:txBody>
+          <a:bodyPr wrap="square">
+            <a:spAutoFit/>
+          </a:bodyPr>
+          <a:lstStyle/>
+          <a:p>
+            <a:pPr algn="l"/>
+            <a:r>
+              <a:rPr sz="1000" b="1" i="0">
+                <a:solidFill>
+                  <a:srgbClr val="C9A84C"/>
+                </a:solidFill>
+                <a:latin typeface="Calibri"/>
+              </a:rPr>
+              <a:t>Endpoint</a:t>
+            </a:r>
+          </a:p>
+        </p:txBody>
+      </p:sp>
+      <p:sp>
+        <p:nvSpPr>
+          <p:cNvPr id="7" name="TextBox 6"/>
+          <p:cNvSpPr txBox="1"/>
+          <p:nvPr/>
+        </p:nvSpPr>
+        <p:spPr>
+          <a:xfrm>
+            <a:off x="5577840" y="1188720"/>
+            <a:ext cx="1645920" cy="347472"/>
+          </a:xfrm>
+          <a:prstGeom prst="rect">
+            <a:avLst/>
+          </a:prstGeom>
+          <a:noFill/>
+        </p:spPr>
+        <p:txBody>
+          <a:bodyPr wrap="square">
+            <a:spAutoFit/>
+          </a:bodyPr>
+          <a:lstStyle/>
+          <a:p>
+            <a:pPr algn="l"/>
+            <a:r>
+              <a:rPr sz="1000" b="1" i="0">
+                <a:solidFill>
+                  <a:srgbClr val="C9A84C"/>
+                </a:solidFill>
+                <a:latin typeface="Calibri"/>
+              </a:rPr>
+              <a:t>Auth</a:t>
+            </a:r>
+          </a:p>
+        </p:txBody>
+      </p:sp>
+      <p:sp>
+        <p:nvSpPr>
+          <p:cNvPr id="8" name="TextBox 7"/>
+          <p:cNvSpPr txBox="1"/>
+          <p:nvPr/>
+        </p:nvSpPr>
+        <p:spPr>
+          <a:xfrm>
+            <a:off x="7223759" y="1188720"/>
+            <a:ext cx="4572000" cy="347472"/>
+          </a:xfrm>
+          <a:prstGeom prst="rect">
+            <a:avLst/>
+          </a:prstGeom>
+          <a:noFill/>
+        </p:spPr>
+        <p:txBody>
+          <a:bodyPr wrap="square">
+            <a:spAutoFit/>
+          </a:bodyPr>
+          <a:lstStyle/>
+          <a:p>
+            <a:pPr algn="l"/>
+            <a:r>
+              <a:rPr sz="1000" b="1" i="0">
+                <a:solidFill>
+                  <a:srgbClr val="C9A84C"/>
+                </a:solidFill>
+                <a:latin typeface="Calibri"/>
+              </a:rPr>
+              <a:t>Description</a:t>
+            </a:r>
+          </a:p>
+        </p:txBody>
+      </p:sp>
+      <p:sp>
+        <p:nvSpPr>
+          <p:cNvPr id="9" name="Rectangle 8"/>
+          <p:cNvSpPr/>
+          <p:nvPr/>
+        </p:nvSpPr>
+        <p:spPr>
+          <a:xfrm>
+            <a:off x="365760" y="1572768"/>
+            <a:ext cx="11430000" cy="384048"/>
+          </a:xfrm>
+          <a:prstGeom prst="rect">
+            <a:avLst/>
+          </a:prstGeom>
+          <a:solidFill>
+            <a:srgbClr val="FFFFFF"/>
+          </a:solidFill>
+          <a:ln w="6350">
+            <a:solidFill>
+              <a:srgbClr val="E0E0E0"/>
+            </a:solidFill>
+          </a:ln>
+        </p:spPr>
+        <p:style>
+          <a:lnRef idx="1">
+            <a:schemeClr val="accent1"/>
+          </a:lnRef>
+          <a:fillRef idx="3">
+            <a:schemeClr val="accent1"/>
+          </a:fillRef>
+          <a:effectRef idx="2">
+            <a:schemeClr val="accent1"/>
+          </a:effectRef>
+          <a:fontRef idx="minor">
+            <a:schemeClr val="lt1"/>
+          </a:fontRef>
+        </p:style>
+        <p:txBody>
+          <a:bodyPr rtlCol="0" anchor="ctr"/>
+          <a:lstStyle/>
+          <a:p>
+            <a:pPr algn="ctr"/>
+            <a:endParaRPr/>
+          </a:p>
+        </p:txBody>
+      </p:sp>
+      <p:sp>
+        <p:nvSpPr>
+          <p:cNvPr id="10" name="Rectangle 9"/>
+          <p:cNvSpPr/>
+          <p:nvPr/>
+        </p:nvSpPr>
+        <p:spPr>
+          <a:xfrm>
+            <a:off x="457200" y="1636776"/>
+            <a:ext cx="868680" cy="256032"/>
+          </a:xfrm>
+          <a:prstGeom prst="rect">
+            <a:avLst/>
+          </a:prstGeom>
+          <a:solidFill>
+            <a:srgbClr val="065A82"/>
+          </a:solidFill>
+          <a:ln>
+            <a:noFill/>
+          </a:ln>
+        </p:spPr>
+        <p:style>
+          <a:lnRef idx="1">
+            <a:schemeClr val="accent1"/>
+          </a:lnRef>
+          <a:fillRef idx="3">
+            <a:schemeClr val="accent1"/>
+          </a:fillRef>
+          <a:effectRef idx="2">
+            <a:schemeClr val="accent1"/>
+          </a:effectRef>
+          <a:fontRef idx="minor">
+            <a:schemeClr val="lt1"/>
+          </a:fontRef>
+        </p:style>
+        <p:txBody>
+          <a:bodyPr rtlCol="0" anchor="ctr"/>
+          <a:lstStyle/>
+          <a:p>
+            <a:pPr algn="ctr"/>
+            <a:endParaRPr/>
+          </a:p>
+        </p:txBody>
+      </p:sp>
+      <p:sp>
+        <p:nvSpPr>
+          <p:cNvPr id="11" name="TextBox 10"/>
+          <p:cNvSpPr txBox="1"/>
+          <p:nvPr/>
+        </p:nvSpPr>
+        <p:spPr>
+          <a:xfrm>
+            <a:off x="457200" y="1655064"/>
+            <a:ext cx="868680" cy="237744"/>
+          </a:xfrm>
+          <a:prstGeom prst="rect">
+            <a:avLst/>
+          </a:prstGeom>
+          <a:noFill/>
+        </p:spPr>
+        <p:txBody>
+          <a:bodyPr wrap="square">
+            <a:spAutoFit/>
+          </a:bodyPr>
+          <a:lstStyle/>
+          <a:p>
+            <a:pPr algn="ctr"/>
+            <a:r>
+              <a:rPr sz="800" b="1" i="0">
+                <a:solidFill>
+                  <a:srgbClr val="FFFFFF"/>
+                </a:solidFill>
+                <a:latin typeface="Calibri"/>
+              </a:rPr>
+              <a:t>POST</a:t>
+            </a:r>
+          </a:p>
+        </p:txBody>
+      </p:sp>
+      <p:sp>
+        <p:nvSpPr>
+          <p:cNvPr id="12" name="TextBox 11"/>
+          <p:cNvSpPr txBox="1"/>
+          <p:nvPr/>
+        </p:nvSpPr>
+        <p:spPr>
+          <a:xfrm>
+            <a:off x="1463040" y="1664208"/>
+            <a:ext cx="3931920" cy="274320"/>
+          </a:xfrm>
+          <a:prstGeom prst="rect">
+            <a:avLst/>
+          </a:prstGeom>
+          <a:noFill/>
+        </p:spPr>
+        <p:txBody>
+          <a:bodyPr wrap="square">
+            <a:spAutoFit/>
+          </a:bodyPr>
+          <a:lstStyle/>
+          <a:p>
+            <a:pPr algn="l"/>
+            <a:r>
+              <a:rPr sz="900" b="0" i="0">
+                <a:solidFill>
+                  <a:srgbClr val="0D1B2A"/>
+                </a:solidFill>
+                <a:latin typeface="Consolas"/>
+              </a:rPr>
+              <a:t>/api/auth/register</a:t>
+            </a:r>
+          </a:p>
+        </p:txBody>
+      </p:sp>
+      <p:sp>
+        <p:nvSpPr>
+          <p:cNvPr id="13" name="TextBox 12"/>
+          <p:cNvSpPr txBox="1"/>
+          <p:nvPr/>
+        </p:nvSpPr>
+        <p:spPr>
+          <a:xfrm>
+            <a:off x="5577840" y="1664208"/>
+            <a:ext cx="1554480" cy="274320"/>
+          </a:xfrm>
+          <a:prstGeom prst="rect">
+            <a:avLst/>
+          </a:prstGeom>
+          <a:noFill/>
+        </p:spPr>
+        <p:txBody>
+          <a:bodyPr wrap="square">
+            <a:spAutoFit/>
+          </a:bodyPr>
+          <a:lstStyle/>
+          <a:p>
+            <a:pPr algn="l"/>
+            <a:r>
+              <a:rPr sz="900" b="1" i="0">
+                <a:solidFill>
+                  <a:srgbClr val="5C6370"/>
+                </a:solidFill>
+                <a:latin typeface="Calibri"/>
+              </a:rPr>
+              <a:t>Public</a:t>
+            </a:r>
+          </a:p>
+        </p:txBody>
+      </p:sp>
+      <p:sp>
+        <p:nvSpPr>
+          <p:cNvPr id="14" name="TextBox 13"/>
+          <p:cNvSpPr txBox="1"/>
+          <p:nvPr/>
+        </p:nvSpPr>
+        <p:spPr>
+          <a:xfrm>
+            <a:off x="7178040" y="1664208"/>
+            <a:ext cx="4480560" cy="274320"/>
+          </a:xfrm>
+          <a:prstGeom prst="rect">
+            <a:avLst/>
+          </a:prstGeom>
+          <a:noFill/>
+        </p:spPr>
+        <p:txBody>
+          <a:bodyPr wrap="square">
+            <a:spAutoFit/>
+          </a:bodyPr>
+          <a:lstStyle/>
+          <a:p>
+            <a:pPr algn="l"/>
+            <a:r>
+              <a:rPr sz="900" b="0" i="0">
+                <a:solidFill>
+                  <a:srgbClr val="5C6370"/>
+                </a:solidFill>
+                <a:latin typeface="Calibri"/>
+              </a:rPr>
+              <a:t>Register mentee or mentor</a:t>
+            </a:r>
+          </a:p>
+        </p:txBody>
+      </p:sp>
+      <p:sp>
+        <p:nvSpPr>
+          <p:cNvPr id="15" name="Rectangle 14"/>
+          <p:cNvSpPr/>
+          <p:nvPr/>
+        </p:nvSpPr>
+        <p:spPr>
+          <a:xfrm>
+            <a:off x="365760" y="1975104"/>
+            <a:ext cx="11430000" cy="384048"/>
+          </a:xfrm>
+          <a:prstGeom prst="rect">
+            <a:avLst/>
+          </a:prstGeom>
+          <a:solidFill>
+            <a:srgbClr val="F4F6F9"/>
+          </a:solidFill>
+          <a:ln w="6350">
+            <a:solidFill>
+              <a:srgbClr val="E0E0E0"/>
+            </a:solidFill>
+          </a:ln>
+        </p:spPr>
+        <p:style>
+          <a:lnRef idx="1">
+            <a:schemeClr val="accent1"/>
+          </a:lnRef>
+          <a:fillRef idx="3">
+            <a:schemeClr val="accent1"/>
+          </a:fillRef>
+          <a:effectRef idx="2">
+            <a:schemeClr val="accent1"/>
+          </a:effectRef>
+          <a:fontRef idx="minor">
+            <a:schemeClr val="lt1"/>
+          </a:fontRef>
+        </p:style>
+        <p:txBody>
+          <a:bodyPr rtlCol="0" anchor="ctr"/>
+          <a:lstStyle/>
+          <a:p>
+            <a:pPr algn="ctr"/>
+            <a:endParaRPr/>
+          </a:p>
+        </p:txBody>
+      </p:sp>
+      <p:sp>
+        <p:nvSpPr>
+          <p:cNvPr id="16" name="Rectangle 15"/>
+          <p:cNvSpPr/>
+          <p:nvPr/>
+        </p:nvSpPr>
+        <p:spPr>
+          <a:xfrm>
+            <a:off x="457200" y="2039112"/>
+            <a:ext cx="868680" cy="256032"/>
+          </a:xfrm>
+          <a:prstGeom prst="rect">
+            <a:avLst/>
+          </a:prstGeom>
+          <a:solidFill>
+            <a:srgbClr val="065A82"/>
+          </a:solidFill>
+          <a:ln>
+            <a:noFill/>
+          </a:ln>
+        </p:spPr>
+        <p:style>
+          <a:lnRef idx="1">
+            <a:schemeClr val="accent1"/>
+          </a:lnRef>
+          <a:fillRef idx="3">
+            <a:schemeClr val="accent1"/>
+          </a:fillRef>
+          <a:effectRef idx="2">
+            <a:schemeClr val="accent1"/>
+          </a:effectRef>
+          <a:fontRef idx="minor">
+            <a:schemeClr val="lt1"/>
+          </a:fontRef>
+        </p:style>
+        <p:txBody>
+          <a:bodyPr rtlCol="0" anchor="ctr"/>
+          <a:lstStyle/>
+          <a:p>
+            <a:pPr algn="ctr"/>
+            <a:endParaRPr/>
+          </a:p>
+        </p:txBody>
+      </p:sp>
+      <p:sp>
+        <p:nvSpPr>
+          <p:cNvPr id="17" name="TextBox 16"/>
+          <p:cNvSpPr txBox="1"/>
+          <p:nvPr/>
+        </p:nvSpPr>
+        <p:spPr>
+          <a:xfrm>
+            <a:off x="457200" y="2057400"/>
+            <a:ext cx="868680" cy="237744"/>
+          </a:xfrm>
+          <a:prstGeom prst="rect">
+            <a:avLst/>
+          </a:prstGeom>
+          <a:noFill/>
+        </p:spPr>
+        <p:txBody>
+          <a:bodyPr wrap="square">
+            <a:spAutoFit/>
+          </a:bodyPr>
+          <a:lstStyle/>
+          <a:p>
+            <a:pPr algn="ctr"/>
+            <a:r>
+              <a:rPr sz="800" b="1" i="0">
+                <a:solidFill>
+                  <a:srgbClr val="FFFFFF"/>
+                </a:solidFill>
+                <a:latin typeface="Calibri"/>
+              </a:rPr>
+              <a:t>POST</a:t>
+            </a:r>
+          </a:p>
+        </p:txBody>
+      </p:sp>
+      <p:sp>
+        <p:nvSpPr>
+          <p:cNvPr id="18" name="TextBox 17"/>
+          <p:cNvSpPr txBox="1"/>
+          <p:nvPr/>
+        </p:nvSpPr>
+        <p:spPr>
+          <a:xfrm>
+            <a:off x="1463040" y="2066544"/>
+            <a:ext cx="3931920" cy="274320"/>
+          </a:xfrm>
+          <a:prstGeom prst="rect">
+            <a:avLst/>
+          </a:prstGeom>
+          <a:noFill/>
+        </p:spPr>
+        <p:txBody>
+          <a:bodyPr wrap="square">
+            <a:spAutoFit/>
+          </a:bodyPr>
+          <a:lstStyle/>
+          <a:p>
+            <a:pPr algn="l"/>
+            <a:r>
+              <a:rPr sz="900" b="0" i="0">
+                <a:solidFill>
+                  <a:srgbClr val="0D1B2A"/>
+                </a:solidFill>
+                <a:latin typeface="Consolas"/>
+              </a:rPr>
+              <a:t>/api/auth/login</a:t>
+            </a:r>
+          </a:p>
+        </p:txBody>
+      </p:sp>
+      <p:sp>
+        <p:nvSpPr>
+          <p:cNvPr id="19" name="TextBox 18"/>
+          <p:cNvSpPr txBox="1"/>
+          <p:nvPr/>
+        </p:nvSpPr>
+        <p:spPr>
+          <a:xfrm>
+            <a:off x="5577840" y="2066544"/>
+            <a:ext cx="1554480" cy="274320"/>
+          </a:xfrm>
+          <a:prstGeom prst="rect">
+            <a:avLst/>
+          </a:prstGeom>
+          <a:noFill/>
+        </p:spPr>
+        <p:txBody>
+          <a:bodyPr wrap="square">
+            <a:spAutoFit/>
+          </a:bodyPr>
+          <a:lstStyle/>
+          <a:p>
+            <a:pPr algn="l"/>
+            <a:r>
+              <a:rPr sz="900" b="1" i="0">
+                <a:solidFill>
+                  <a:srgbClr val="5C6370"/>
+                </a:solidFill>
+                <a:latin typeface="Calibri"/>
+              </a:rPr>
+              <a:t>Public</a:t>
+            </a:r>
+          </a:p>
+        </p:txBody>
+      </p:sp>
+      <p:sp>
+        <p:nvSpPr>
+          <p:cNvPr id="20" name="TextBox 19"/>
+          <p:cNvSpPr txBox="1"/>
+          <p:nvPr/>
+        </p:nvSpPr>
+        <p:spPr>
+          <a:xfrm>
+            <a:off x="7178040" y="2066544"/>
+            <a:ext cx="4480560" cy="274320"/>
+          </a:xfrm>
+          <a:prstGeom prst="rect">
+            <a:avLst/>
+          </a:prstGeom>
+          <a:noFill/>
+        </p:spPr>
+        <p:txBody>
+          <a:bodyPr wrap="square">
+            <a:spAutoFit/>
+          </a:bodyPr>
+          <a:lstStyle/>
+          <a:p>
+            <a:pPr algn="l"/>
+            <a:r>
+              <a:rPr sz="900" b="0" i="0">
+                <a:solidFill>
+                  <a:srgbClr val="5C6370"/>
+                </a:solidFill>
+                <a:latin typeface="Calibri"/>
+              </a:rPr>
+              <a:t>Login — returns JWT token</a:t>
+            </a:r>
+          </a:p>
+        </p:txBody>
+      </p:sp>
+      <p:sp>
+        <p:nvSpPr>
+          <p:cNvPr id="21" name="Rectangle 20"/>
+          <p:cNvSpPr/>
+          <p:nvPr/>
+        </p:nvSpPr>
+        <p:spPr>
+          <a:xfrm>
+            <a:off x="365760" y="2377440"/>
+            <a:ext cx="11430000" cy="384048"/>
+          </a:xfrm>
+          <a:prstGeom prst="rect">
+            <a:avLst/>
+          </a:prstGeom>
+          <a:solidFill>
+            <a:srgbClr val="FFFFFF"/>
+          </a:solidFill>
+          <a:ln w="6350">
+            <a:solidFill>
+              <a:srgbClr val="E0E0E0"/>
+            </a:solidFill>
+          </a:ln>
+        </p:spPr>
+        <p:style>
+          <a:lnRef idx="1">
+            <a:schemeClr val="accent1"/>
+          </a:lnRef>
+          <a:fillRef idx="3">
+            <a:schemeClr val="accent1"/>
+          </a:fillRef>
+          <a:effectRef idx="2">
+            <a:schemeClr val="accent1"/>
+          </a:effectRef>
+          <a:fontRef idx="minor">
+            <a:schemeClr val="lt1"/>
+          </a:fontRef>
+        </p:style>
+        <p:txBody>
+          <a:bodyPr rtlCol="0" anchor="ctr"/>
+          <a:lstStyle/>
+          <a:p>
+            <a:pPr algn="ctr"/>
+            <a:endParaRPr/>
+          </a:p>
+        </p:txBody>
+      </p:sp>
+      <p:sp>
+        <p:nvSpPr>
+          <p:cNvPr id="22" name="Rectangle 21"/>
+          <p:cNvSpPr/>
+          <p:nvPr/>
+        </p:nvSpPr>
+        <p:spPr>
+          <a:xfrm>
+            <a:off x="457200" y="2441448"/>
+            <a:ext cx="868680" cy="256032"/>
+          </a:xfrm>
+          <a:prstGeom prst="rect">
+            <a:avLst/>
+          </a:prstGeom>
+          <a:solidFill>
+            <a:srgbClr val="2D8C5E"/>
+          </a:solidFill>
+          <a:ln>
+            <a:noFill/>
+          </a:ln>
+        </p:spPr>
+        <p:style>
+          <a:lnRef idx="1">
+            <a:schemeClr val="accent1"/>
+          </a:lnRef>
+          <a:fillRef idx="3">
+            <a:schemeClr val="accent1"/>
+          </a:fillRef>
+          <a:effectRef idx="2">
+            <a:schemeClr val="accent1"/>
+          </a:effectRef>
+          <a:fontRef idx="minor">
+            <a:schemeClr val="lt1"/>
+          </a:fontRef>
+        </p:style>
+        <p:txBody>
+          <a:bodyPr rtlCol="0" anchor="ctr"/>
+          <a:lstStyle/>
+          <a:p>
+            <a:pPr algn="ctr"/>
+            <a:endParaRPr/>
+          </a:p>
+        </p:txBody>
+      </p:sp>
+      <p:sp>
+        <p:nvSpPr>
+          <p:cNvPr id="23" name="TextBox 22"/>
+          <p:cNvSpPr txBox="1"/>
+          <p:nvPr/>
+        </p:nvSpPr>
+        <p:spPr>
+          <a:xfrm>
+            <a:off x="457200" y="2459736"/>
+            <a:ext cx="868680" cy="237744"/>
+          </a:xfrm>
+          <a:prstGeom prst="rect">
+            <a:avLst/>
+          </a:prstGeom>
+          <a:noFill/>
+        </p:spPr>
+        <p:txBody>
+          <a:bodyPr wrap="square">
+            <a:spAutoFit/>
+          </a:bodyPr>
+          <a:lstStyle/>
+          <a:p>
+            <a:pPr algn="ctr"/>
+            <a:r>
+              <a:rPr sz="800" b="1" i="0">
+                <a:solidFill>
+                  <a:srgbClr val="FFFFFF"/>
+                </a:solidFill>
+                <a:latin typeface="Calibri"/>
+              </a:rPr>
+              <a:t>GET</a:t>
+            </a:r>
+          </a:p>
+        </p:txBody>
+      </p:sp>
+      <p:sp>
+        <p:nvSpPr>
+          <p:cNvPr id="24" name="TextBox 23"/>
+          <p:cNvSpPr txBox="1"/>
+          <p:nvPr/>
+        </p:nvSpPr>
+        <p:spPr>
+          <a:xfrm>
+            <a:off x="1463040" y="2468880"/>
+            <a:ext cx="3931920" cy="274320"/>
+          </a:xfrm>
+          <a:prstGeom prst="rect">
+            <a:avLst/>
+          </a:prstGeom>
+          <a:noFill/>
+        </p:spPr>
+        <p:txBody>
+          <a:bodyPr wrap="square">
+            <a:spAutoFit/>
+          </a:bodyPr>
+          <a:lstStyle/>
+          <a:p>
+            <a:pPr algn="l"/>
+            <a:r>
+              <a:rPr sz="900" b="0" i="0">
+                <a:solidFill>
+                  <a:srgbClr val="0D1B2A"/>
+                </a:solidFill>
+                <a:latin typeface="Consolas"/>
+              </a:rPr>
+              <a:t>/api/auth/me</a:t>
+            </a:r>
+          </a:p>
+        </p:txBody>
+      </p:sp>
+      <p:sp>
+        <p:nvSpPr>
+          <p:cNvPr id="25" name="TextBox 24"/>
+          <p:cNvSpPr txBox="1"/>
+          <p:nvPr/>
+        </p:nvSpPr>
+        <p:spPr>
+          <a:xfrm>
+            <a:off x="5577840" y="2468880"/>
+            <a:ext cx="1554480" cy="274320"/>
+          </a:xfrm>
+          <a:prstGeom prst="rect">
+            <a:avLst/>
+          </a:prstGeom>
+          <a:noFill/>
+        </p:spPr>
+        <p:txBody>
+          <a:bodyPr wrap="square">
+            <a:spAutoFit/>
+          </a:bodyPr>
+          <a:lstStyle/>
+          <a:p>
+            <a:pPr algn="l"/>
+            <a:r>
+              <a:rPr sz="900" b="1" i="0">
+                <a:solidFill>
+                  <a:srgbClr val="5C6370"/>
+                </a:solidFill>
+                <a:latin typeface="Calibri"/>
+              </a:rPr>
+              <a:t>Any</a:t>
+            </a:r>
+          </a:p>
+        </p:txBody>
+      </p:sp>
+      <p:sp>
+        <p:nvSpPr>
+          <p:cNvPr id="26" name="TextBox 25"/>
+          <p:cNvSpPr txBox="1"/>
+          <p:nvPr/>
+        </p:nvSpPr>
+        <p:spPr>
+          <a:xfrm>
+            <a:off x="7178040" y="2468880"/>
+            <a:ext cx="4480560" cy="274320"/>
+          </a:xfrm>
+          <a:prstGeom prst="rect">
+            <a:avLst/>
+          </a:prstGeom>
+          <a:noFill/>
+        </p:spPr>
+        <p:txBody>
+          <a:bodyPr wrap="square">
+            <a:spAutoFit/>
+          </a:bodyPr>
+          <a:lstStyle/>
+          <a:p>
+            <a:pPr algn="l"/>
+            <a:r>
+              <a:rPr sz="900" b="0" i="0">
+                <a:solidFill>
+                  <a:srgbClr val="5C6370"/>
+                </a:solidFill>
+                <a:latin typeface="Calibri"/>
+              </a:rPr>
+              <a:t>Get current authenticated user</a:t>
+            </a:r>
+          </a:p>
+        </p:txBody>
+      </p:sp>
+      <p:sp>
+        <p:nvSpPr>
+          <p:cNvPr id="27" name="Rectangle 26"/>
+          <p:cNvSpPr/>
+          <p:nvPr/>
+        </p:nvSpPr>
+        <p:spPr>
+          <a:xfrm>
+            <a:off x="365760" y="2779776"/>
+            <a:ext cx="11430000" cy="384048"/>
+          </a:xfrm>
+          <a:prstGeom prst="rect">
+            <a:avLst/>
+          </a:prstGeom>
+          <a:solidFill>
+            <a:srgbClr val="F4F6F9"/>
+          </a:solidFill>
+          <a:ln w="6350">
+            <a:solidFill>
+              <a:srgbClr val="E0E0E0"/>
+            </a:solidFill>
+          </a:ln>
+        </p:spPr>
+        <p:style>
+          <a:lnRef idx="1">
+            <a:schemeClr val="accent1"/>
+          </a:lnRef>
+          <a:fillRef idx="3">
+            <a:schemeClr val="accent1"/>
+          </a:fillRef>
+          <a:effectRef idx="2">
+            <a:schemeClr val="accent1"/>
+          </a:effectRef>
+          <a:fontRef idx="minor">
+            <a:schemeClr val="lt1"/>
+          </a:fontRef>
+        </p:style>
+        <p:txBody>
+          <a:bodyPr rtlCol="0" anchor="ctr"/>
+          <a:lstStyle/>
+          <a:p>
+            <a:pPr algn="ctr"/>
+            <a:endParaRPr/>
+          </a:p>
+        </p:txBody>
+      </p:sp>
+      <p:sp>
+        <p:nvSpPr>
+          <p:cNvPr id="28" name="Rectangle 27"/>
+          <p:cNvSpPr/>
+          <p:nvPr/>
+        </p:nvSpPr>
+        <p:spPr>
+          <a:xfrm>
+            <a:off x="457200" y="2843784"/>
+            <a:ext cx="868680" cy="256032"/>
+          </a:xfrm>
+          <a:prstGeom prst="rect">
+            <a:avLst/>
+          </a:prstGeom>
+          <a:solidFill>
+            <a:srgbClr val="2D8C5E"/>
+          </a:solidFill>
+          <a:ln>
+            <a:noFill/>
+          </a:ln>
+        </p:spPr>
+        <p:style>
+          <a:lnRef idx="1">
+            <a:schemeClr val="accent1"/>
+          </a:lnRef>
+          <a:fillRef idx="3">
+            <a:schemeClr val="accent1"/>
+          </a:fillRef>
+          <a:effectRef idx="2">
+            <a:schemeClr val="accent1"/>
+          </a:effectRef>
+          <a:fontRef idx="minor">
+            <a:schemeClr val="lt1"/>
+          </a:fontRef>
+        </p:style>
+        <p:txBody>
+          <a:bodyPr rtlCol="0" anchor="ctr"/>
+          <a:lstStyle/>
+          <a:p>
+            <a:pPr algn="ctr"/>
+            <a:endParaRPr/>
+          </a:p>
+        </p:txBody>
+      </p:sp>
+      <p:sp>
+        <p:nvSpPr>
+          <p:cNvPr id="29" name="TextBox 28"/>
+          <p:cNvSpPr txBox="1"/>
+          <p:nvPr/>
+        </p:nvSpPr>
+        <p:spPr>
+          <a:xfrm>
+            <a:off x="457200" y="2862072"/>
+            <a:ext cx="868680" cy="237744"/>
+          </a:xfrm>
+          <a:prstGeom prst="rect">
+            <a:avLst/>
+          </a:prstGeom>
+          <a:noFill/>
+        </p:spPr>
+        <p:txBody>
+          <a:bodyPr wrap="square">
+            <a:spAutoFit/>
+          </a:bodyPr>
+          <a:lstStyle/>
+          <a:p>
+            <a:pPr algn="ctr"/>
+            <a:r>
+              <a:rPr sz="800" b="1" i="0">
+                <a:solidFill>
+                  <a:srgbClr val="FFFFFF"/>
+                </a:solidFill>
+                <a:latin typeface="Calibri"/>
+              </a:rPr>
+              <a:t>GET</a:t>
+            </a:r>
+          </a:p>
+        </p:txBody>
+      </p:sp>
+      <p:sp>
+        <p:nvSpPr>
+          <p:cNvPr id="30" name="TextBox 29"/>
+          <p:cNvSpPr txBox="1"/>
+          <p:nvPr/>
+        </p:nvSpPr>
+        <p:spPr>
+          <a:xfrm>
+            <a:off x="1463040" y="2871216"/>
+            <a:ext cx="3931920" cy="274320"/>
+          </a:xfrm>
+          <a:prstGeom prst="rect">
+            <a:avLst/>
+          </a:prstGeom>
+          <a:noFill/>
+        </p:spPr>
+        <p:txBody>
+          <a:bodyPr wrap="square">
+            <a:spAutoFit/>
+          </a:bodyPr>
+          <a:lstStyle/>
+          <a:p>
+            <a:pPr algn="l"/>
+            <a:r>
+              <a:rPr sz="900" b="0" i="0">
+                <a:solidFill>
+                  <a:srgbClr val="0D1B2A"/>
+                </a:solidFill>
+                <a:latin typeface="Consolas"/>
+              </a:rPr>
+              <a:t>/api/users/mentors</a:t>
+            </a:r>
+          </a:p>
+        </p:txBody>
+      </p:sp>
+      <p:sp>
+        <p:nvSpPr>
+          <p:cNvPr id="31" name="TextBox 30"/>
+          <p:cNvSpPr txBox="1"/>
+          <p:nvPr/>
+        </p:nvSpPr>
+        <p:spPr>
+          <a:xfrm>
+            <a:off x="5577840" y="2871216"/>
+            <a:ext cx="1554480" cy="274320"/>
+          </a:xfrm>
+          <a:prstGeom prst="rect">
+            <a:avLst/>
+          </a:prstGeom>
+          <a:noFill/>
+        </p:spPr>
+        <p:txBody>
+          <a:bodyPr wrap="square">
+            <a:spAutoFit/>
+          </a:bodyPr>
+          <a:lstStyle/>
+          <a:p>
+            <a:pPr algn="l"/>
+            <a:r>
+              <a:rPr sz="900" b="1" i="0">
+                <a:solidFill>
+                  <a:srgbClr val="5C6370"/>
+                </a:solidFill>
+                <a:latin typeface="Calibri"/>
+              </a:rPr>
+              <a:t>Any</a:t>
+            </a:r>
+          </a:p>
+        </p:txBody>
+      </p:sp>
+      <p:sp>
+        <p:nvSpPr>
+          <p:cNvPr id="32" name="TextBox 31"/>
+          <p:cNvSpPr txBox="1"/>
+          <p:nvPr/>
+        </p:nvSpPr>
+        <p:spPr>
+          <a:xfrm>
+            <a:off x="7178040" y="2871216"/>
+            <a:ext cx="4480560" cy="274320"/>
+          </a:xfrm>
+          <a:prstGeom prst="rect">
+            <a:avLst/>
+          </a:prstGeom>
+          <a:noFill/>
+        </p:spPr>
+        <p:txBody>
+          <a:bodyPr wrap="square">
+            <a:spAutoFit/>
+          </a:bodyPr>
+          <a:lstStyle/>
+          <a:p>
+            <a:pPr algn="l"/>
+            <a:r>
+              <a:rPr sz="900" b="0" i="0">
+                <a:solidFill>
+                  <a:srgbClr val="5C6370"/>
+                </a:solidFill>
+                <a:latin typeface="Calibri"/>
+              </a:rPr>
+              <a:t>List all approved mentors</a:t>
+            </a:r>
+          </a:p>
+        </p:txBody>
+      </p:sp>
+      <p:sp>
+        <p:nvSpPr>
+          <p:cNvPr id="33" name="Rectangle 32"/>
+          <p:cNvSpPr/>
+          <p:nvPr/>
+        </p:nvSpPr>
+        <p:spPr>
+          <a:xfrm>
+            <a:off x="365760" y="3182112"/>
+            <a:ext cx="11430000" cy="384048"/>
+          </a:xfrm>
+          <a:prstGeom prst="rect">
+            <a:avLst/>
+          </a:prstGeom>
+          <a:solidFill>
+            <a:srgbClr val="FFFFFF"/>
+          </a:solidFill>
+          <a:ln w="6350">
+            <a:solidFill>
+              <a:srgbClr val="E0E0E0"/>
+            </a:solidFill>
+          </a:ln>
+        </p:spPr>
+        <p:style>
+          <a:lnRef idx="1">
+            <a:schemeClr val="accent1"/>
+          </a:lnRef>
+          <a:fillRef idx="3">
+            <a:schemeClr val="accent1"/>
+          </a:fillRef>
+          <a:effectRef idx="2">
+            <a:schemeClr val="accent1"/>
+          </a:effectRef>
+          <a:fontRef idx="minor">
+            <a:schemeClr val="lt1"/>
+          </a:fontRef>
+        </p:style>
+        <p:txBody>
+          <a:bodyPr rtlCol="0" anchor="ctr"/>
+          <a:lstStyle/>
+          <a:p>
+            <a:pPr algn="ctr"/>
+            <a:endParaRPr/>
+          </a:p>
+        </p:txBody>
+      </p:sp>
+      <p:sp>
+        <p:nvSpPr>
+          <p:cNvPr id="34" name="Rectangle 33"/>
+          <p:cNvSpPr/>
+          <p:nvPr/>
+        </p:nvSpPr>
+        <p:spPr>
+          <a:xfrm>
+            <a:off x="457200" y="3246120"/>
+            <a:ext cx="868680" cy="256032"/>
+          </a:xfrm>
+          <a:prstGeom prst="rect">
+            <a:avLst/>
+          </a:prstGeom>
+          <a:solidFill>
+            <a:srgbClr val="2D8C5E"/>
+          </a:solidFill>
+          <a:ln>
+            <a:noFill/>
+          </a:ln>
+        </p:spPr>
+        <p:style>
+          <a:lnRef idx="1">
+            <a:schemeClr val="accent1"/>
+          </a:lnRef>
+          <a:fillRef idx="3">
+            <a:schemeClr val="accent1"/>
+          </a:fillRef>
+          <a:effectRef idx="2">
+            <a:schemeClr val="accent1"/>
+          </a:effectRef>
+          <a:fontRef idx="minor">
+            <a:schemeClr val="lt1"/>
+          </a:fontRef>
+        </p:style>
+        <p:txBody>
+          <a:bodyPr rtlCol="0" anchor="ctr"/>
+          <a:lstStyle/>
+          <a:p>
+            <a:pPr algn="ctr"/>
+            <a:endParaRPr/>
+          </a:p>
+        </p:txBody>
+      </p:sp>
+      <p:sp>
+        <p:nvSpPr>
+          <p:cNvPr id="35" name="TextBox 34"/>
+          <p:cNvSpPr txBox="1"/>
+          <p:nvPr/>
+        </p:nvSpPr>
+        <p:spPr>
+          <a:xfrm>
+            <a:off x="457200" y="3264408"/>
+            <a:ext cx="868680" cy="237744"/>
+          </a:xfrm>
+          <a:prstGeom prst="rect">
+            <a:avLst/>
+          </a:prstGeom>
+          <a:noFill/>
+        </p:spPr>
+        <p:txBody>
+          <a:bodyPr wrap="square">
+            <a:spAutoFit/>
+          </a:bodyPr>
+          <a:lstStyle/>
+          <a:p>
+            <a:pPr algn="ctr"/>
+            <a:r>
+              <a:rPr sz="800" b="1" i="0">
+                <a:solidFill>
+                  <a:srgbClr val="FFFFFF"/>
+                </a:solidFill>
+                <a:latin typeface="Calibri"/>
+              </a:rPr>
+              <a:t>GET</a:t>
+            </a:r>
+          </a:p>
+        </p:txBody>
+      </p:sp>
+      <p:sp>
+        <p:nvSpPr>
+          <p:cNvPr id="36" name="TextBox 35"/>
+          <p:cNvSpPr txBox="1"/>
+          <p:nvPr/>
+        </p:nvSpPr>
+        <p:spPr>
+          <a:xfrm>
+            <a:off x="1463040" y="3273552"/>
+            <a:ext cx="3931920" cy="274320"/>
+          </a:xfrm>
+          <a:prstGeom prst="rect">
+            <a:avLst/>
+          </a:prstGeom>
+          <a:noFill/>
+        </p:spPr>
+        <p:txBody>
+          <a:bodyPr wrap="square">
+            <a:spAutoFit/>
+          </a:bodyPr>
+          <a:lstStyle/>
+          <a:p>
+            <a:pPr algn="l"/>
+            <a:r>
+              <a:rPr sz="900" b="0" i="0">
+                <a:solidFill>
+                  <a:srgbClr val="0D1B2A"/>
+                </a:solidFill>
+                <a:latin typeface="Consolas"/>
+              </a:rPr>
+              <a:t>/api/users/pending</a:t>
+            </a:r>
+          </a:p>
+        </p:txBody>
+      </p:sp>
+      <p:sp>
+        <p:nvSpPr>
+          <p:cNvPr id="37" name="TextBox 36"/>
+          <p:cNvSpPr txBox="1"/>
+          <p:nvPr/>
+        </p:nvSpPr>
+        <p:spPr>
+          <a:xfrm>
+            <a:off x="5577840" y="3273552"/>
+            <a:ext cx="1554480" cy="274320"/>
+          </a:xfrm>
+          <a:prstGeom prst="rect">
+            <a:avLst/>
+          </a:prstGeom>
+          <a:noFill/>
+        </p:spPr>
+        <p:txBody>
+          <a:bodyPr wrap="square">
+            <a:spAutoFit/>
+          </a:bodyPr>
+          <a:lstStyle/>
+          <a:p>
+            <a:pPr algn="l"/>
+            <a:r>
+              <a:rPr sz="900" b="1" i="0">
+                <a:solidFill>
+                  <a:srgbClr val="C0392B"/>
+                </a:solidFill>
+                <a:latin typeface="Calibri"/>
+              </a:rPr>
+              <a:t>Admin</a:t>
+            </a:r>
+          </a:p>
+        </p:txBody>
+      </p:sp>
+      <p:sp>
+        <p:nvSpPr>
+          <p:cNvPr id="38" name="TextBox 37"/>
+          <p:cNvSpPr txBox="1"/>
+          <p:nvPr/>
+        </p:nvSpPr>
+        <p:spPr>
+          <a:xfrm>
+            <a:off x="7178040" y="3273552"/>
+            <a:ext cx="4480560" cy="274320"/>
+          </a:xfrm>
+          <a:prstGeom prst="rect">
+            <a:avLst/>
+          </a:prstGeom>
+          <a:noFill/>
+        </p:spPr>
+        <p:txBody>
+          <a:bodyPr wrap="square">
+            <a:spAutoFit/>
+          </a:bodyPr>
+          <a:lstStyle/>
+          <a:p>
+            <a:pPr algn="l"/>
+            <a:r>
+              <a:rPr sz="900" b="0" i="0">
+                <a:solidFill>
+                  <a:srgbClr val="5C6370"/>
+                </a:solidFill>
+                <a:latin typeface="Calibri"/>
+              </a:rPr>
+              <a:t>Pending mentor applications</a:t>
+            </a:r>
+          </a:p>
+        </p:txBody>
+      </p:sp>
+      <p:sp>
+        <p:nvSpPr>
+          <p:cNvPr id="39" name="Rectangle 38"/>
+          <p:cNvSpPr/>
+          <p:nvPr/>
+        </p:nvSpPr>
+        <p:spPr>
+          <a:xfrm>
+            <a:off x="365760" y="3584448"/>
+            <a:ext cx="11430000" cy="384048"/>
+          </a:xfrm>
+          <a:prstGeom prst="rect">
+            <a:avLst/>
+          </a:prstGeom>
+          <a:solidFill>
+            <a:srgbClr val="F4F6F9"/>
+          </a:solidFill>
+          <a:ln w="6350">
+            <a:solidFill>
+              <a:srgbClr val="E0E0E0"/>
+            </a:solidFill>
+          </a:ln>
+        </p:spPr>
+        <p:style>
+          <a:lnRef idx="1">
+            <a:schemeClr val="accent1"/>
+          </a:lnRef>
+          <a:fillRef idx="3">
+            <a:schemeClr val="accent1"/>
+          </a:fillRef>
+          <a:effectRef idx="2">
+            <a:schemeClr val="accent1"/>
+          </a:effectRef>
+          <a:fontRef idx="minor">
+            <a:schemeClr val="lt1"/>
+          </a:fontRef>
+        </p:style>
+        <p:txBody>
+          <a:bodyPr rtlCol="0" anchor="ctr"/>
+          <a:lstStyle/>
+          <a:p>
+            <a:pPr algn="ctr"/>
+            <a:endParaRPr/>
+          </a:p>
+        </p:txBody>
+      </p:sp>
+      <p:sp>
+        <p:nvSpPr>
+          <p:cNvPr id="40" name="Rectangle 39"/>
+          <p:cNvSpPr/>
+          <p:nvPr/>
+        </p:nvSpPr>
+        <p:spPr>
+          <a:xfrm>
+            <a:off x="457200" y="3648456"/>
+            <a:ext cx="868680" cy="256032"/>
+          </a:xfrm>
+          <a:prstGeom prst="rect">
+            <a:avLst/>
+          </a:prstGeom>
+          <a:solidFill>
+            <a:srgbClr val="C9A84C"/>
+          </a:solidFill>
+          <a:ln>
+            <a:noFill/>
+          </a:ln>
+        </p:spPr>
+        <p:style>
+          <a:lnRef idx="1">
+            <a:schemeClr val="accent1"/>
+          </a:lnRef>
+          <a:fillRef idx="3">
+            <a:schemeClr val="accent1"/>
+          </a:fillRef>
+          <a:effectRef idx="2">
+            <a:schemeClr val="accent1"/>
+          </a:effectRef>
+          <a:fontRef idx="minor">
+            <a:schemeClr val="lt1"/>
+          </a:fontRef>
+        </p:style>
+        <p:txBody>
+          <a:bodyPr rtlCol="0" anchor="ctr"/>
+          <a:lstStyle/>
+          <a:p>
+            <a:pPr algn="ctr"/>
+            <a:endParaRPr/>
+          </a:p>
+        </p:txBody>
+      </p:sp>
+      <p:sp>
+        <p:nvSpPr>
+          <p:cNvPr id="41" name="TextBox 40"/>
+          <p:cNvSpPr txBox="1"/>
+          <p:nvPr/>
+        </p:nvSpPr>
+        <p:spPr>
+          <a:xfrm>
+            <a:off x="457200" y="3666744"/>
+            <a:ext cx="868680" cy="237744"/>
+          </a:xfrm>
+          <a:prstGeom prst="rect">
+            <a:avLst/>
+          </a:prstGeom>
+          <a:noFill/>
+        </p:spPr>
+        <p:txBody>
+          <a:bodyPr wrap="square">
+            <a:spAutoFit/>
+          </a:bodyPr>
+          <a:lstStyle/>
+          <a:p>
+            <a:pPr algn="ctr"/>
+            <a:r>
+              <a:rPr sz="800" b="1" i="0">
+                <a:solidFill>
+                  <a:srgbClr val="FFFFFF"/>
+                </a:solidFill>
+                <a:latin typeface="Calibri"/>
+              </a:rPr>
+              <a:t>PATCH</a:t>
+            </a:r>
+          </a:p>
+        </p:txBody>
+      </p:sp>
+      <p:sp>
+        <p:nvSpPr>
+          <p:cNvPr id="42" name="TextBox 41"/>
+          <p:cNvSpPr txBox="1"/>
+          <p:nvPr/>
+        </p:nvSpPr>
+        <p:spPr>
+          <a:xfrm>
+            <a:off x="1463040" y="3675887"/>
+            <a:ext cx="3931920" cy="274320"/>
+          </a:xfrm>
+          <a:prstGeom prst="rect">
+            <a:avLst/>
+          </a:prstGeom>
+          <a:noFill/>
+        </p:spPr>
+        <p:txBody>
+          <a:bodyPr wrap="square">
+            <a:spAutoFit/>
+          </a:bodyPr>
+          <a:lstStyle/>
+          <a:p>
+            <a:pPr algn="l"/>
+            <a:r>
+              <a:rPr sz="900" b="0" i="0">
+                <a:solidFill>
+                  <a:srgbClr val="0D1B2A"/>
+                </a:solidFill>
+                <a:latin typeface="Consolas"/>
+              </a:rPr>
+              <a:t>/api/users/:id/approve</a:t>
+            </a:r>
+          </a:p>
+        </p:txBody>
+      </p:sp>
+      <p:sp>
+        <p:nvSpPr>
+          <p:cNvPr id="43" name="TextBox 42"/>
+          <p:cNvSpPr txBox="1"/>
+          <p:nvPr/>
+        </p:nvSpPr>
+        <p:spPr>
+          <a:xfrm>
+            <a:off x="5577840" y="3675887"/>
+            <a:ext cx="1554480" cy="274320"/>
+          </a:xfrm>
+          <a:prstGeom prst="rect">
+            <a:avLst/>
+          </a:prstGeom>
+          <a:noFill/>
+        </p:spPr>
+        <p:txBody>
+          <a:bodyPr wrap="square">
+            <a:spAutoFit/>
+          </a:bodyPr>
+          <a:lstStyle/>
+          <a:p>
+            <a:pPr algn="l"/>
+            <a:r>
+              <a:rPr sz="900" b="1" i="0">
+                <a:solidFill>
+                  <a:srgbClr val="C0392B"/>
+                </a:solidFill>
+                <a:latin typeface="Calibri"/>
+              </a:rPr>
+              <a:t>Admin</a:t>
+            </a:r>
+          </a:p>
+        </p:txBody>
+      </p:sp>
+      <p:sp>
+        <p:nvSpPr>
+          <p:cNvPr id="44" name="TextBox 43"/>
+          <p:cNvSpPr txBox="1"/>
+          <p:nvPr/>
+        </p:nvSpPr>
+        <p:spPr>
+          <a:xfrm>
+            <a:off x="7178040" y="3675887"/>
+            <a:ext cx="4480560" cy="274320"/>
+          </a:xfrm>
+          <a:prstGeom prst="rect">
+            <a:avLst/>
+          </a:prstGeom>
+          <a:noFill/>
+        </p:spPr>
+        <p:txBody>
+          <a:bodyPr wrap="square">
+            <a:spAutoFit/>
+          </a:bodyPr>
+          <a:lstStyle/>
+          <a:p>
+            <a:pPr algn="l"/>
+            <a:r>
+              <a:rPr sz="900" b="0" i="0">
+                <a:solidFill>
+                  <a:srgbClr val="5C6370"/>
+                </a:solidFill>
+                <a:latin typeface="Calibri"/>
+              </a:rPr>
+              <a:t>Approve or reject a mentor</a:t>
+            </a:r>
+          </a:p>
+        </p:txBody>
+      </p:sp>
+      <p:sp>
+        <p:nvSpPr>
+          <p:cNvPr id="45" name="Rectangle 44"/>
+          <p:cNvSpPr/>
+          <p:nvPr/>
+        </p:nvSpPr>
+        <p:spPr>
+          <a:xfrm>
+            <a:off x="365760" y="3986784"/>
+            <a:ext cx="11430000" cy="384048"/>
+          </a:xfrm>
+          <a:prstGeom prst="rect">
+            <a:avLst/>
+          </a:prstGeom>
+          <a:solidFill>
+            <a:srgbClr val="FFFFFF"/>
+          </a:solidFill>
+          <a:ln w="6350">
+            <a:solidFill>
+              <a:srgbClr val="E0E0E0"/>
+            </a:solidFill>
+          </a:ln>
+        </p:spPr>
+        <p:style>
+          <a:lnRef idx="1">
+            <a:schemeClr val="accent1"/>
+          </a:lnRef>
+          <a:fillRef idx="3">
+            <a:schemeClr val="accent1"/>
+          </a:fillRef>
+          <a:effectRef idx="2">
+            <a:schemeClr val="accent1"/>
+          </a:effectRef>
+          <a:fontRef idx="minor">
+            <a:schemeClr val="lt1"/>
+          </a:fontRef>
+        </p:style>
+        <p:txBody>
+          <a:bodyPr rtlCol="0" anchor="ctr"/>
+          <a:lstStyle/>
+          <a:p>
+            <a:pPr algn="ctr"/>
+            <a:endParaRPr/>
+          </a:p>
+        </p:txBody>
+      </p:sp>
+      <p:sp>
+        <p:nvSpPr>
+          <p:cNvPr id="46" name="Rectangle 45"/>
+          <p:cNvSpPr/>
+          <p:nvPr/>
+        </p:nvSpPr>
+        <p:spPr>
+          <a:xfrm>
+            <a:off x="457200" y="4050792"/>
+            <a:ext cx="868680" cy="256032"/>
+          </a:xfrm>
+          <a:prstGeom prst="rect">
+            <a:avLst/>
+          </a:prstGeom>
+          <a:solidFill>
+            <a:srgbClr val="065A82"/>
+          </a:solidFill>
+          <a:ln>
+            <a:noFill/>
+          </a:ln>
+        </p:spPr>
+        <p:style>
+          <a:lnRef idx="1">
+            <a:schemeClr val="accent1"/>
+          </a:lnRef>
+          <a:fillRef idx="3">
+            <a:schemeClr val="accent1"/>
+          </a:fillRef>
+          <a:effectRef idx="2">
+            <a:schemeClr val="accent1"/>
+          </a:effectRef>
+          <a:fontRef idx="minor">
+            <a:schemeClr val="lt1"/>
+          </a:fontRef>
+        </p:style>
+        <p:txBody>
+          <a:bodyPr rtlCol="0" anchor="ctr"/>
+          <a:lstStyle/>
+          <a:p>
+            <a:pPr algn="ctr"/>
+            <a:endParaRPr/>
+          </a:p>
+        </p:txBody>
+      </p:sp>
+      <p:sp>
+        <p:nvSpPr>
+          <p:cNvPr id="47" name="TextBox 46"/>
+          <p:cNvSpPr txBox="1"/>
+          <p:nvPr/>
+        </p:nvSpPr>
+        <p:spPr>
+          <a:xfrm>
+            <a:off x="457200" y="4069080"/>
+            <a:ext cx="868680" cy="237744"/>
+          </a:xfrm>
+          <a:prstGeom prst="rect">
+            <a:avLst/>
+          </a:prstGeom>
+          <a:noFill/>
+        </p:spPr>
+        <p:txBody>
+          <a:bodyPr wrap="square">
+            <a:spAutoFit/>
+          </a:bodyPr>
+          <a:lstStyle/>
+          <a:p>
+            <a:pPr algn="ctr"/>
+            <a:r>
+              <a:rPr sz="800" b="1" i="0">
+                <a:solidFill>
+                  <a:srgbClr val="FFFFFF"/>
+                </a:solidFill>
+                <a:latin typeface="Calibri"/>
+              </a:rPr>
+              <a:t>POST</a:t>
+            </a:r>
+          </a:p>
+        </p:txBody>
+      </p:sp>
+      <p:sp>
+        <p:nvSpPr>
+          <p:cNvPr id="48" name="TextBox 47"/>
+          <p:cNvSpPr txBox="1"/>
+          <p:nvPr/>
+        </p:nvSpPr>
+        <p:spPr>
+          <a:xfrm>
+            <a:off x="1463040" y="4078224"/>
+            <a:ext cx="3931920" cy="274320"/>
+          </a:xfrm>
+          <a:prstGeom prst="rect">
+            <a:avLst/>
+          </a:prstGeom>
+          <a:noFill/>
+        </p:spPr>
+        <p:txBody>
+          <a:bodyPr wrap="square">
+            <a:spAutoFit/>
+          </a:bodyPr>
+          <a:lstStyle/>
+          <a:p>
+            <a:pPr algn="l"/>
+            <a:r>
+              <a:rPr sz="900" b="0" i="0">
+                <a:solidFill>
+                  <a:srgbClr val="0D1B2A"/>
+                </a:solidFill>
+                <a:latin typeface="Consolas"/>
+              </a:rPr>
+              <a:t>/api/sessions</a:t>
+            </a:r>
+          </a:p>
+        </p:txBody>
+      </p:sp>
+      <p:sp>
+        <p:nvSpPr>
+          <p:cNvPr id="49" name="TextBox 48"/>
+          <p:cNvSpPr txBox="1"/>
+          <p:nvPr/>
+        </p:nvSpPr>
+        <p:spPr>
+          <a:xfrm>
+            <a:off x="5577840" y="4078224"/>
+            <a:ext cx="1554480" cy="274320"/>
+          </a:xfrm>
+          <a:prstGeom prst="rect">
+            <a:avLst/>
+          </a:prstGeom>
+          <a:noFill/>
+        </p:spPr>
+        <p:txBody>
+          <a:bodyPr wrap="square">
+            <a:spAutoFit/>
+          </a:bodyPr>
+          <a:lstStyle/>
+          <a:p>
+            <a:pPr algn="l"/>
+            <a:r>
+              <a:rPr sz="900" b="1" i="0">
+                <a:solidFill>
+                  <a:srgbClr val="065A82"/>
+                </a:solidFill>
+                <a:latin typeface="Calibri"/>
+              </a:rPr>
+              <a:t>Mentee</a:t>
+            </a:r>
+          </a:p>
+        </p:txBody>
+      </p:sp>
+      <p:sp>
+        <p:nvSpPr>
+          <p:cNvPr id="50" name="TextBox 49"/>
+          <p:cNvSpPr txBox="1"/>
+          <p:nvPr/>
+        </p:nvSpPr>
+        <p:spPr>
+          <a:xfrm>
+            <a:off x="7178040" y="4078224"/>
+            <a:ext cx="4480560" cy="274320"/>
+          </a:xfrm>
+          <a:prstGeom prst="rect">
+            <a:avLst/>
+          </a:prstGeom>
+          <a:noFill/>
+        </p:spPr>
+        <p:txBody>
+          <a:bodyPr wrap="square">
+            <a:spAutoFit/>
+          </a:bodyPr>
+          <a:lstStyle/>
+          <a:p>
+            <a:pPr algn="l"/>
+            <a:r>
+              <a:rPr sz="900" b="0" i="0">
+                <a:solidFill>
+                  <a:srgbClr val="5C6370"/>
+                </a:solidFill>
+                <a:latin typeface="Calibri"/>
+              </a:rPr>
+              <a:t>Book a new session</a:t>
+            </a:r>
+          </a:p>
+        </p:txBody>
+      </p:sp>
+      <p:sp>
+        <p:nvSpPr>
+          <p:cNvPr id="51" name="Rectangle 50"/>
+          <p:cNvSpPr/>
+          <p:nvPr/>
+        </p:nvSpPr>
+        <p:spPr>
+          <a:xfrm>
+            <a:off x="365760" y="4389120"/>
+            <a:ext cx="11430000" cy="384048"/>
+          </a:xfrm>
+          <a:prstGeom prst="rect">
+            <a:avLst/>
+          </a:prstGeom>
+          <a:solidFill>
+            <a:srgbClr val="F4F6F9"/>
+          </a:solidFill>
+          <a:ln w="6350">
+            <a:solidFill>
+              <a:srgbClr val="E0E0E0"/>
+            </a:solidFill>
+          </a:ln>
+        </p:spPr>
+        <p:style>
+          <a:lnRef idx="1">
+            <a:schemeClr val="accent1"/>
+          </a:lnRef>
+          <a:fillRef idx="3">
+            <a:schemeClr val="accent1"/>
+          </a:fillRef>
+          <a:effectRef idx="2">
+            <a:schemeClr val="accent1"/>
+          </a:effectRef>
+          <a:fontRef idx="minor">
+            <a:schemeClr val="lt1"/>
+          </a:fontRef>
+        </p:style>
+        <p:txBody>
+          <a:bodyPr rtlCol="0" anchor="ctr"/>
+          <a:lstStyle/>
+          <a:p>
+            <a:pPr algn="ctr"/>
+            <a:endParaRPr/>
+          </a:p>
+        </p:txBody>
+      </p:sp>
+      <p:sp>
+        <p:nvSpPr>
+          <p:cNvPr id="52" name="Rectangle 51"/>
+          <p:cNvSpPr/>
+          <p:nvPr/>
+        </p:nvSpPr>
+        <p:spPr>
+          <a:xfrm>
+            <a:off x="457200" y="4453128"/>
+            <a:ext cx="868680" cy="256032"/>
+          </a:xfrm>
+          <a:prstGeom prst="rect">
+            <a:avLst/>
+          </a:prstGeom>
+          <a:solidFill>
+            <a:srgbClr val="2D8C5E"/>
+          </a:solidFill>
+          <a:ln>
+            <a:noFill/>
+          </a:ln>
+        </p:spPr>
+        <p:style>
+          <a:lnRef idx="1">
+            <a:schemeClr val="accent1"/>
+          </a:lnRef>
+          <a:fillRef idx="3">
+            <a:schemeClr val="accent1"/>
+          </a:fillRef>
+          <a:effectRef idx="2">
+            <a:schemeClr val="accent1"/>
+          </a:effectRef>
+          <a:fontRef idx="minor">
+            <a:schemeClr val="lt1"/>
+          </a:fontRef>
+        </p:style>
+        <p:txBody>
+          <a:bodyPr rtlCol="0" anchor="ctr"/>
+          <a:lstStyle/>
+          <a:p>
+            <a:pPr algn="ctr"/>
+            <a:endParaRPr/>
+          </a:p>
+        </p:txBody>
+      </p:sp>
+      <p:sp>
+        <p:nvSpPr>
+          <p:cNvPr id="53" name="TextBox 52"/>
+          <p:cNvSpPr txBox="1"/>
+          <p:nvPr/>
+        </p:nvSpPr>
+        <p:spPr>
+          <a:xfrm>
+            <a:off x="457200" y="4471416"/>
+            <a:ext cx="868680" cy="237744"/>
+          </a:xfrm>
+          <a:prstGeom prst="rect">
+            <a:avLst/>
+          </a:prstGeom>
+          <a:noFill/>
+        </p:spPr>
+        <p:txBody>
+          <a:bodyPr wrap="square">
+            <a:spAutoFit/>
+          </a:bodyPr>
+          <a:lstStyle/>
+          <a:p>
+            <a:pPr algn="ctr"/>
+            <a:r>
+              <a:rPr sz="800" b="1" i="0">
+                <a:solidFill>
+                  <a:srgbClr val="FFFFFF"/>
+                </a:solidFill>
+                <a:latin typeface="Calibri"/>
+              </a:rPr>
+              <a:t>GET</a:t>
+            </a:r>
+          </a:p>
+        </p:txBody>
+      </p:sp>
+      <p:sp>
+        <p:nvSpPr>
+          <p:cNvPr id="54" name="TextBox 53"/>
+          <p:cNvSpPr txBox="1"/>
+          <p:nvPr/>
+        </p:nvSpPr>
+        <p:spPr>
+          <a:xfrm>
+            <a:off x="1463040" y="4480559"/>
+            <a:ext cx="3931920" cy="274320"/>
+          </a:xfrm>
+          <a:prstGeom prst="rect">
+            <a:avLst/>
+          </a:prstGeom>
+          <a:noFill/>
+        </p:spPr>
+        <p:txBody>
+          <a:bodyPr wrap="square">
+            <a:spAutoFit/>
+          </a:bodyPr>
+          <a:lstStyle/>
+          <a:p>
+            <a:pPr algn="l"/>
+            <a:r>
+              <a:rPr sz="900" b="0" i="0">
+                <a:solidFill>
+                  <a:srgbClr val="0D1B2A"/>
+                </a:solidFill>
+                <a:latin typeface="Consolas"/>
+              </a:rPr>
+              <a:t>/api/sessions</a:t>
+            </a:r>
+          </a:p>
+        </p:txBody>
+      </p:sp>
+      <p:sp>
+        <p:nvSpPr>
+          <p:cNvPr id="55" name="TextBox 54"/>
+          <p:cNvSpPr txBox="1"/>
+          <p:nvPr/>
+        </p:nvSpPr>
+        <p:spPr>
+          <a:xfrm>
+            <a:off x="5577840" y="4480559"/>
+            <a:ext cx="1554480" cy="274320"/>
+          </a:xfrm>
+          <a:prstGeom prst="rect">
+            <a:avLst/>
+          </a:prstGeom>
+          <a:noFill/>
+        </p:spPr>
+        <p:txBody>
+          <a:bodyPr wrap="square">
+            <a:spAutoFit/>
+          </a:bodyPr>
+          <a:lstStyle/>
+          <a:p>
+            <a:pPr algn="l"/>
+            <a:r>
+              <a:rPr sz="900" b="1" i="0">
+                <a:solidFill>
+                  <a:srgbClr val="5C6370"/>
+                </a:solidFill>
+                <a:latin typeface="Calibri"/>
+              </a:rPr>
+              <a:t>Any</a:t>
+            </a:r>
+          </a:p>
+        </p:txBody>
+      </p:sp>
+      <p:sp>
+        <p:nvSpPr>
+          <p:cNvPr id="56" name="TextBox 55"/>
+          <p:cNvSpPr txBox="1"/>
+          <p:nvPr/>
+        </p:nvSpPr>
+        <p:spPr>
+          <a:xfrm>
+            <a:off x="7178040" y="4480559"/>
+            <a:ext cx="4480560" cy="274320"/>
+          </a:xfrm>
+          <a:prstGeom prst="rect">
+            <a:avLst/>
+          </a:prstGeom>
+          <a:noFill/>
+        </p:spPr>
+        <p:txBody>
+          <a:bodyPr wrap="square">
+            <a:spAutoFit/>
+          </a:bodyPr>
+          <a:lstStyle/>
+          <a:p>
+            <a:pPr algn="l"/>
+            <a:r>
+              <a:rPr sz="900" b="0" i="0">
+                <a:solidFill>
+                  <a:srgbClr val="5C6370"/>
+                </a:solidFill>
+                <a:latin typeface="Calibri"/>
+              </a:rPr>
+              <a:t>Get sessions for logged-in user</a:t>
+            </a:r>
+          </a:p>
+        </p:txBody>
+      </p:sp>
+      <p:sp>
+        <p:nvSpPr>
+          <p:cNvPr id="57" name="Rectangle 56"/>
+          <p:cNvSpPr/>
+          <p:nvPr/>
+        </p:nvSpPr>
+        <p:spPr>
+          <a:xfrm>
+            <a:off x="365760" y="4791456"/>
+            <a:ext cx="11430000" cy="384048"/>
+          </a:xfrm>
+          <a:prstGeom prst="rect">
+            <a:avLst/>
+          </a:prstGeom>
+          <a:solidFill>
+            <a:srgbClr val="FFFFFF"/>
+          </a:solidFill>
+          <a:ln w="6350">
+            <a:solidFill>
+              <a:srgbClr val="E0E0E0"/>
+            </a:solidFill>
+          </a:ln>
+        </p:spPr>
+        <p:style>
+          <a:lnRef idx="1">
+            <a:schemeClr val="accent1"/>
+          </a:lnRef>
+          <a:fillRef idx="3">
+            <a:schemeClr val="accent1"/>
+          </a:fillRef>
+          <a:effectRef idx="2">
+            <a:schemeClr val="accent1"/>
+          </a:effectRef>
+          <a:fontRef idx="minor">
+            <a:schemeClr val="lt1"/>
+          </a:fontRef>
+        </p:style>
+        <p:txBody>
+          <a:bodyPr rtlCol="0" anchor="ctr"/>
+          <a:lstStyle/>
+          <a:p>
+            <a:pPr algn="ctr"/>
+            <a:endParaRPr/>
+          </a:p>
+        </p:txBody>
+      </p:sp>
+      <p:sp>
+        <p:nvSpPr>
+          <p:cNvPr id="58" name="Rectangle 57"/>
+          <p:cNvSpPr/>
+          <p:nvPr/>
+        </p:nvSpPr>
+        <p:spPr>
+          <a:xfrm>
+            <a:off x="457200" y="4855464"/>
+            <a:ext cx="868680" cy="256032"/>
+          </a:xfrm>
+          <a:prstGeom prst="rect">
+            <a:avLst/>
+          </a:prstGeom>
+          <a:solidFill>
+            <a:srgbClr val="C9A84C"/>
+          </a:solidFill>
+          <a:ln>
+            <a:noFill/>
+          </a:ln>
+        </p:spPr>
+        <p:style>
+          <a:lnRef idx="1">
+            <a:schemeClr val="accent1"/>
+          </a:lnRef>
+          <a:fillRef idx="3">
+            <a:schemeClr val="accent1"/>
+          </a:fillRef>
+          <a:effectRef idx="2">
+            <a:schemeClr val="accent1"/>
+          </a:effectRef>
+          <a:fontRef idx="minor">
+            <a:schemeClr val="lt1"/>
+          </a:fontRef>
+        </p:style>
+        <p:txBody>
+          <a:bodyPr rtlCol="0" anchor="ctr"/>
+          <a:lstStyle/>
+          <a:p>
+            <a:pPr algn="ctr"/>
+            <a:endParaRPr/>
+          </a:p>
+        </p:txBody>
+      </p:sp>
+      <p:sp>
+        <p:nvSpPr>
+          <p:cNvPr id="59" name="TextBox 58"/>
+          <p:cNvSpPr txBox="1"/>
+          <p:nvPr/>
+        </p:nvSpPr>
+        <p:spPr>
+          <a:xfrm>
+            <a:off x="457200" y="4873752"/>
+            <a:ext cx="868680" cy="237744"/>
+          </a:xfrm>
+          <a:prstGeom prst="rect">
+            <a:avLst/>
+          </a:prstGeom>
+          <a:noFill/>
+        </p:spPr>
+        <p:txBody>
+          <a:bodyPr wrap="square">
+            <a:spAutoFit/>
+          </a:bodyPr>
+          <a:lstStyle/>
+          <a:p>
+            <a:pPr algn="ctr"/>
+            <a:r>
+              <a:rPr sz="800" b="1" i="0">
+                <a:solidFill>
+                  <a:srgbClr val="FFFFFF"/>
+                </a:solidFill>
+                <a:latin typeface="Calibri"/>
+              </a:rPr>
+              <a:t>PATCH</a:t>
+            </a:r>
+          </a:p>
+        </p:txBody>
+      </p:sp>
+      <p:sp>
+        <p:nvSpPr>
+          <p:cNvPr id="60" name="TextBox 59"/>
+          <p:cNvSpPr txBox="1"/>
+          <p:nvPr/>
+        </p:nvSpPr>
+        <p:spPr>
+          <a:xfrm>
+            <a:off x="1463040" y="4882896"/>
+            <a:ext cx="3931920" cy="274320"/>
+          </a:xfrm>
+          <a:prstGeom prst="rect">
+            <a:avLst/>
+          </a:prstGeom>
+          <a:noFill/>
+        </p:spPr>
+        <p:txBody>
+          <a:bodyPr wrap="square">
+            <a:spAutoFit/>
+          </a:bodyPr>
+          <a:lstStyle/>
+          <a:p>
+            <a:pPr algn="l"/>
+            <a:r>
+              <a:rPr sz="900" b="0" i="0">
+                <a:solidFill>
+                  <a:srgbClr val="0D1B2A"/>
+                </a:solidFill>
+                <a:latin typeface="Consolas"/>
+              </a:rPr>
+              <a:t>/api/sessions/:id/status</a:t>
+            </a:r>
+          </a:p>
+        </p:txBody>
+      </p:sp>
+      <p:sp>
+        <p:nvSpPr>
+          <p:cNvPr id="61" name="TextBox 60"/>
+          <p:cNvSpPr txBox="1"/>
+          <p:nvPr/>
+        </p:nvSpPr>
+        <p:spPr>
+          <a:xfrm>
+            <a:off x="5577840" y="4882896"/>
+            <a:ext cx="1554480" cy="274320"/>
+          </a:xfrm>
+          <a:prstGeom prst="rect">
+            <a:avLst/>
+          </a:prstGeom>
+          <a:noFill/>
+        </p:spPr>
+        <p:txBody>
+          <a:bodyPr wrap="square">
+            <a:spAutoFit/>
+          </a:bodyPr>
+          <a:lstStyle/>
+          <a:p>
+            <a:pPr algn="l"/>
+            <a:r>
+              <a:rPr sz="900" b="1" i="0">
+                <a:solidFill>
+                  <a:srgbClr val="2D6A4F"/>
+                </a:solidFill>
+                <a:latin typeface="Calibri"/>
+              </a:rPr>
+              <a:t>Mentor/Admin</a:t>
+            </a:r>
+          </a:p>
+        </p:txBody>
+      </p:sp>
+      <p:sp>
+        <p:nvSpPr>
+          <p:cNvPr id="62" name="TextBox 61"/>
+          <p:cNvSpPr txBox="1"/>
+          <p:nvPr/>
+        </p:nvSpPr>
+        <p:spPr>
+          <a:xfrm>
+            <a:off x="7178040" y="4882896"/>
+            <a:ext cx="4480560" cy="274320"/>
+          </a:xfrm>
+          <a:prstGeom prst="rect">
+            <a:avLst/>
+          </a:prstGeom>
+          <a:noFill/>
+        </p:spPr>
+        <p:txBody>
+          <a:bodyPr wrap="square">
+            <a:spAutoFit/>
+          </a:bodyPr>
+          <a:lstStyle/>
+          <a:p>
+            <a:pPr algn="l"/>
+            <a:r>
+              <a:rPr sz="900" b="0" i="0">
+                <a:solidFill>
+                  <a:srgbClr val="5C6370"/>
+                </a:solidFill>
+                <a:latin typeface="Calibri"/>
+              </a:rPr>
+              <a:t>Update session status</a:t>
+            </a:r>
+          </a:p>
+        </p:txBody>
+      </p:sp>
+      <p:sp>
+        <p:nvSpPr>
+          <p:cNvPr id="63" name="Rectangle 62"/>
+          <p:cNvSpPr/>
+          <p:nvPr/>
+        </p:nvSpPr>
+        <p:spPr>
+          <a:xfrm>
+            <a:off x="365760" y="5193792"/>
+            <a:ext cx="11430000" cy="384048"/>
+          </a:xfrm>
+          <a:prstGeom prst="rect">
+            <a:avLst/>
+          </a:prstGeom>
+          <a:solidFill>
+            <a:srgbClr val="F4F6F9"/>
+          </a:solidFill>
+          <a:ln w="6350">
+            <a:solidFill>
+              <a:srgbClr val="E0E0E0"/>
+            </a:solidFill>
+          </a:ln>
+        </p:spPr>
+        <p:style>
+          <a:lnRef idx="1">
+            <a:schemeClr val="accent1"/>
+          </a:lnRef>
+          <a:fillRef idx="3">
+            <a:schemeClr val="accent1"/>
+          </a:fillRef>
+          <a:effectRef idx="2">
+            <a:schemeClr val="accent1"/>
+          </a:effectRef>
+          <a:fontRef idx="minor">
+            <a:schemeClr val="lt1"/>
+          </a:fontRef>
+        </p:style>
+        <p:txBody>
+          <a:bodyPr rtlCol="0" anchor="ctr"/>
+          <a:lstStyle/>
+          <a:p>
+            <a:pPr algn="ctr"/>
+            <a:endParaRPr/>
+          </a:p>
+        </p:txBody>
+      </p:sp>
+      <p:sp>
+        <p:nvSpPr>
+          <p:cNvPr id="64" name="Rectangle 63"/>
+          <p:cNvSpPr/>
+          <p:nvPr/>
+        </p:nvSpPr>
+        <p:spPr>
+          <a:xfrm>
+            <a:off x="457200" y="5257800"/>
+            <a:ext cx="868680" cy="256032"/>
+          </a:xfrm>
+          <a:prstGeom prst="rect">
+            <a:avLst/>
+          </a:prstGeom>
+          <a:solidFill>
+            <a:srgbClr val="065A82"/>
+          </a:solidFill>
+          <a:ln>
+            <a:noFill/>
+          </a:ln>
+        </p:spPr>
+        <p:style>
+          <a:lnRef idx="1">
+            <a:schemeClr val="accent1"/>
+          </a:lnRef>
+          <a:fillRef idx="3">
+            <a:schemeClr val="accent1"/>
+          </a:fillRef>
+          <a:effectRef idx="2">
+            <a:schemeClr val="accent1"/>
+          </a:effectRef>
+          <a:fontRef idx="minor">
+            <a:schemeClr val="lt1"/>
+          </a:fontRef>
+        </p:style>
+        <p:txBody>
+          <a:bodyPr rtlCol="0" anchor="ctr"/>
+          <a:lstStyle/>
+          <a:p>
+            <a:pPr algn="ctr"/>
+            <a:endParaRPr/>
+          </a:p>
+        </p:txBody>
+      </p:sp>
+      <p:sp>
+        <p:nvSpPr>
+          <p:cNvPr id="65" name="TextBox 64"/>
+          <p:cNvSpPr txBox="1"/>
+          <p:nvPr/>
+        </p:nvSpPr>
+        <p:spPr>
+          <a:xfrm>
+            <a:off x="457200" y="5276088"/>
+            <a:ext cx="868680" cy="237744"/>
+          </a:xfrm>
+          <a:prstGeom prst="rect">
+            <a:avLst/>
+          </a:prstGeom>
+          <a:noFill/>
+        </p:spPr>
+        <p:txBody>
+          <a:bodyPr wrap="square">
+            <a:spAutoFit/>
+          </a:bodyPr>
+          <a:lstStyle/>
+          <a:p>
+            <a:pPr algn="ctr"/>
+            <a:r>
+              <a:rPr sz="800" b="1" i="0">
+                <a:solidFill>
+                  <a:srgbClr val="FFFFFF"/>
+                </a:solidFill>
+                <a:latin typeface="Calibri"/>
+              </a:rPr>
+              <a:t>POST</a:t>
+            </a:r>
+          </a:p>
+        </p:txBody>
+      </p:sp>
+      <p:sp>
+        <p:nvSpPr>
+          <p:cNvPr id="66" name="TextBox 65"/>
+          <p:cNvSpPr txBox="1"/>
+          <p:nvPr/>
+        </p:nvSpPr>
+        <p:spPr>
+          <a:xfrm>
+            <a:off x="1463040" y="5285231"/>
+            <a:ext cx="3931920" cy="274320"/>
+          </a:xfrm>
+          <a:prstGeom prst="rect">
+            <a:avLst/>
+          </a:prstGeom>
+          <a:noFill/>
+        </p:spPr>
+        <p:txBody>
+          <a:bodyPr wrap="square">
+            <a:spAutoFit/>
+          </a:bodyPr>
+          <a:lstStyle/>
+          <a:p>
+            <a:pPr algn="l"/>
+            <a:r>
+              <a:rPr sz="900" b="0" i="0">
+                <a:solidFill>
+                  <a:srgbClr val="0D1B2A"/>
+                </a:solidFill>
+                <a:latin typeface="Consolas"/>
+              </a:rPr>
+              <a:t>/api/feedback</a:t>
+            </a:r>
+          </a:p>
+        </p:txBody>
+      </p:sp>
+      <p:sp>
+        <p:nvSpPr>
+          <p:cNvPr id="67" name="TextBox 66"/>
+          <p:cNvSpPr txBox="1"/>
+          <p:nvPr/>
+        </p:nvSpPr>
+        <p:spPr>
+          <a:xfrm>
+            <a:off x="5577840" y="5285231"/>
+            <a:ext cx="1554480" cy="274320"/>
+          </a:xfrm>
+          <a:prstGeom prst="rect">
+            <a:avLst/>
+          </a:prstGeom>
+          <a:noFill/>
+        </p:spPr>
+        <p:txBody>
+          <a:bodyPr wrap="square">
+            <a:spAutoFit/>
+          </a:bodyPr>
+          <a:lstStyle/>
+          <a:p>
+            <a:pPr algn="l"/>
+            <a:r>
+              <a:rPr sz="900" b="1" i="0">
+                <a:solidFill>
+                  <a:srgbClr val="065A82"/>
+                </a:solidFill>
+                <a:latin typeface="Calibri"/>
+              </a:rPr>
+              <a:t>Mentee</a:t>
+            </a:r>
+          </a:p>
+        </p:txBody>
+      </p:sp>
+      <p:sp>
+        <p:nvSpPr>
+          <p:cNvPr id="68" name="TextBox 67"/>
+          <p:cNvSpPr txBox="1"/>
+          <p:nvPr/>
+        </p:nvSpPr>
+        <p:spPr>
+          <a:xfrm>
+            <a:off x="7178040" y="5285231"/>
+            <a:ext cx="4480560" cy="274320"/>
+          </a:xfrm>
+          <a:prstGeom prst="rect">
+            <a:avLst/>
+          </a:prstGeom>
+          <a:noFill/>
+        </p:spPr>
+        <p:txBody>
+          <a:bodyPr wrap="square">
+            <a:spAutoFit/>
+          </a:bodyPr>
+          <a:lstStyle/>
+          <a:p>
+            <a:pPr algn="l"/>
+            <a:r>
+              <a:rPr sz="900" b="0" i="0">
+                <a:solidFill>
+                  <a:srgbClr val="5C6370"/>
+                </a:solidFill>
+                <a:latin typeface="Calibri"/>
+              </a:rPr>
+              <a:t>Submit feedback after session</a:t>
+            </a:r>
+          </a:p>
+        </p:txBody>
+      </p:sp>
+      <p:sp>
+        <p:nvSpPr>
+          <p:cNvPr id="69" name="Rectangle 68"/>
+          <p:cNvSpPr/>
+          <p:nvPr/>
+        </p:nvSpPr>
+        <p:spPr>
+          <a:xfrm>
+            <a:off x="365760" y="5596128"/>
+            <a:ext cx="11430000" cy="384048"/>
+          </a:xfrm>
+          <a:prstGeom prst="rect">
+            <a:avLst/>
+          </a:prstGeom>
+          <a:solidFill>
+            <a:srgbClr val="FFFFFF"/>
+          </a:solidFill>
+          <a:ln w="6350">
+            <a:solidFill>
+              <a:srgbClr val="E0E0E0"/>
+            </a:solidFill>
+          </a:ln>
+        </p:spPr>
+        <p:style>
+          <a:lnRef idx="1">
+            <a:schemeClr val="accent1"/>
+          </a:lnRef>
+          <a:fillRef idx="3">
+            <a:schemeClr val="accent1"/>
+          </a:fillRef>
+          <a:effectRef idx="2">
+            <a:schemeClr val="accent1"/>
+          </a:effectRef>
+          <a:fontRef idx="minor">
+            <a:schemeClr val="lt1"/>
+          </a:fontRef>
+        </p:style>
+        <p:txBody>
+          <a:bodyPr rtlCol="0" anchor="ctr"/>
+          <a:lstStyle/>
+          <a:p>
+            <a:pPr algn="ctr"/>
+            <a:endParaRPr/>
+          </a:p>
+        </p:txBody>
+      </p:sp>
+      <p:sp>
+        <p:nvSpPr>
+          <p:cNvPr id="70" name="Rectangle 69"/>
+          <p:cNvSpPr/>
+          <p:nvPr/>
+        </p:nvSpPr>
+        <p:spPr>
+          <a:xfrm>
+            <a:off x="457200" y="5660136"/>
+            <a:ext cx="868680" cy="256032"/>
+          </a:xfrm>
+          <a:prstGeom prst="rect">
+            <a:avLst/>
+          </a:prstGeom>
+          <a:solidFill>
+            <a:srgbClr val="2D8C5E"/>
+          </a:solidFill>
+          <a:ln>
+            <a:noFill/>
+          </a:ln>
+        </p:spPr>
+        <p:style>
+          <a:lnRef idx="1">
+            <a:schemeClr val="accent1"/>
+          </a:lnRef>
+          <a:fillRef idx="3">
+            <a:schemeClr val="accent1"/>
+          </a:fillRef>
+          <a:effectRef idx="2">
+            <a:schemeClr val="accent1"/>
+          </a:effectRef>
+          <a:fontRef idx="minor">
+            <a:schemeClr val="lt1"/>
+          </a:fontRef>
+        </p:style>
+        <p:txBody>
+          <a:bodyPr rtlCol="0" anchor="ctr"/>
+          <a:lstStyle/>
+          <a:p>
+            <a:pPr algn="ctr"/>
+            <a:endParaRPr/>
+          </a:p>
+        </p:txBody>
+      </p:sp>
+      <p:sp>
+        <p:nvSpPr>
+          <p:cNvPr id="71" name="TextBox 70"/>
+          <p:cNvSpPr txBox="1"/>
+          <p:nvPr/>
+        </p:nvSpPr>
+        <p:spPr>
+          <a:xfrm>
+            <a:off x="457200" y="5678424"/>
+            <a:ext cx="868680" cy="237744"/>
+          </a:xfrm>
+          <a:prstGeom prst="rect">
+            <a:avLst/>
+          </a:prstGeom>
+          <a:noFill/>
+        </p:spPr>
+        <p:txBody>
+          <a:bodyPr wrap="square">
+            <a:spAutoFit/>
+          </a:bodyPr>
+          <a:lstStyle/>
+          <a:p>
+            <a:pPr algn="ctr"/>
+            <a:r>
+              <a:rPr sz="800" b="1" i="0">
+                <a:solidFill>
+                  <a:srgbClr val="FFFFFF"/>
+                </a:solidFill>
+                <a:latin typeface="Calibri"/>
+              </a:rPr>
+              <a:t>GET</a:t>
+            </a:r>
+          </a:p>
+        </p:txBody>
+      </p:sp>
+      <p:sp>
+        <p:nvSpPr>
+          <p:cNvPr id="72" name="TextBox 71"/>
+          <p:cNvSpPr txBox="1"/>
+          <p:nvPr/>
+        </p:nvSpPr>
+        <p:spPr>
+          <a:xfrm>
+            <a:off x="1463040" y="5687568"/>
+            <a:ext cx="3931920" cy="274320"/>
+          </a:xfrm>
+          <a:prstGeom prst="rect">
+            <a:avLst/>
+          </a:prstGeom>
+          <a:noFill/>
+        </p:spPr>
+        <p:txBody>
+          <a:bodyPr wrap="square">
+            <a:spAutoFit/>
+          </a:bodyPr>
+          <a:lstStyle/>
+          <a:p>
+            <a:pPr algn="l"/>
+            <a:r>
+              <a:rPr sz="900" b="0" i="0">
+                <a:solidFill>
+                  <a:srgbClr val="0D1B2A"/>
+                </a:solidFill>
+                <a:latin typeface="Consolas"/>
+              </a:rPr>
+              <a:t>/api/feedback/mentor/:id</a:t>
+            </a:r>
+          </a:p>
+        </p:txBody>
+      </p:sp>
+      <p:sp>
+        <p:nvSpPr>
+          <p:cNvPr id="73" name="TextBox 72"/>
+          <p:cNvSpPr txBox="1"/>
+          <p:nvPr/>
+        </p:nvSpPr>
+        <p:spPr>
+          <a:xfrm>
+            <a:off x="5577840" y="5687568"/>
+            <a:ext cx="1554480" cy="274320"/>
+          </a:xfrm>
+          <a:prstGeom prst="rect">
+            <a:avLst/>
+          </a:prstGeom>
+          <a:noFill/>
+        </p:spPr>
+        <p:txBody>
+          <a:bodyPr wrap="square">
+            <a:spAutoFit/>
+          </a:bodyPr>
+          <a:lstStyle/>
+          <a:p>
+            <a:pPr algn="l"/>
+            <a:r>
+              <a:rPr sz="900" b="1" i="0">
+                <a:solidFill>
+                  <a:srgbClr val="5C6370"/>
+                </a:solidFill>
+                <a:latin typeface="Calibri"/>
+              </a:rPr>
+              <a:t>Any</a:t>
+            </a:r>
+          </a:p>
+        </p:txBody>
+      </p:sp>
+      <p:sp>
+        <p:nvSpPr>
+          <p:cNvPr id="74" name="TextBox 73"/>
+          <p:cNvSpPr txBox="1"/>
+          <p:nvPr/>
+        </p:nvSpPr>
+        <p:spPr>
+          <a:xfrm>
+            <a:off x="7178040" y="5687568"/>
+            <a:ext cx="4480560" cy="274320"/>
+          </a:xfrm>
+          <a:prstGeom prst="rect">
+            <a:avLst/>
+          </a:prstGeom>
+          <a:noFill/>
+        </p:spPr>
+        <p:txBody>
+          <a:bodyPr wrap="square">
+            <a:spAutoFit/>
+          </a:bodyPr>
+          <a:lstStyle/>
+          <a:p>
+            <a:pPr algn="l"/>
+            <a:r>
+              <a:rPr sz="900" b="0" i="0">
+                <a:solidFill>
+                  <a:srgbClr val="5C6370"/>
+                </a:solidFill>
+                <a:latin typeface="Calibri"/>
+              </a:rPr>
+              <a:t>Get feedback for a mentor</a:t>
+            </a:r>
+          </a:p>
+        </p:txBody>
+      </p:sp>
+      <p:sp>
+        <p:nvSpPr>
+          <p:cNvPr id="75" name="Rectangle 74"/>
+          <p:cNvSpPr/>
+          <p:nvPr/>
+        </p:nvSpPr>
+        <p:spPr>
+          <a:xfrm>
+            <a:off x="365760" y="5998464"/>
+            <a:ext cx="11430000" cy="384048"/>
+          </a:xfrm>
+          <a:prstGeom prst="rect">
+            <a:avLst/>
+          </a:prstGeom>
+          <a:solidFill>
+            <a:srgbClr val="F4F6F9"/>
+          </a:solidFill>
+          <a:ln w="6350">
+            <a:solidFill>
+              <a:srgbClr val="E0E0E0"/>
+            </a:solidFill>
+          </a:ln>
+        </p:spPr>
+        <p:style>
+          <a:lnRef idx="1">
+            <a:schemeClr val="accent1"/>
+          </a:lnRef>
+          <a:fillRef idx="3">
+            <a:schemeClr val="accent1"/>
+          </a:fillRef>
+          <a:effectRef idx="2">
+            <a:schemeClr val="accent1"/>
+          </a:effectRef>
+          <a:fontRef idx="minor">
+            <a:schemeClr val="lt1"/>
+          </a:fontRef>
+        </p:style>
+        <p:txBody>
+          <a:bodyPr rtlCol="0" anchor="ctr"/>
+          <a:lstStyle/>
+          <a:p>
+            <a:pPr algn="ctr"/>
+            <a:endParaRPr/>
+          </a:p>
+        </p:txBody>
+      </p:sp>
+      <p:sp>
+        <p:nvSpPr>
+          <p:cNvPr id="76" name="Rectangle 75"/>
+          <p:cNvSpPr/>
+          <p:nvPr/>
+        </p:nvSpPr>
+        <p:spPr>
+          <a:xfrm>
+            <a:off x="457200" y="6062472"/>
+            <a:ext cx="868680" cy="256032"/>
+          </a:xfrm>
+          <a:prstGeom prst="rect">
+            <a:avLst/>
+          </a:prstGeom>
+          <a:solidFill>
+            <a:srgbClr val="2D8C5E"/>
+          </a:solidFill>
+          <a:ln>
+            <a:noFill/>
+          </a:ln>
+        </p:spPr>
+        <p:style>
+          <a:lnRef idx="1">
+            <a:schemeClr val="accent1"/>
+          </a:lnRef>
+          <a:fillRef idx="3">
+            <a:schemeClr val="accent1"/>
+          </a:fillRef>
+          <a:effectRef idx="2">
+            <a:schemeClr val="accent1"/>
+          </a:effectRef>
+          <a:fontRef idx="minor">
+            <a:schemeClr val="lt1"/>
+          </a:fontRef>
+        </p:style>
+        <p:txBody>
+          <a:bodyPr rtlCol="0" anchor="ctr"/>
+          <a:lstStyle/>
+          <a:p>
+            <a:pPr algn="ctr"/>
+            <a:endParaRPr/>
+          </a:p>
+        </p:txBody>
+      </p:sp>
+      <p:sp>
+        <p:nvSpPr>
+          <p:cNvPr id="77" name="TextBox 76"/>
+          <p:cNvSpPr txBox="1"/>
+          <p:nvPr/>
+        </p:nvSpPr>
+        <p:spPr>
+          <a:xfrm>
+            <a:off x="457200" y="6080759"/>
+            <a:ext cx="868680" cy="237744"/>
+          </a:xfrm>
+          <a:prstGeom prst="rect">
+            <a:avLst/>
+          </a:prstGeom>
+          <a:noFill/>
+        </p:spPr>
+        <p:txBody>
+          <a:bodyPr wrap="square">
+            <a:spAutoFit/>
+          </a:bodyPr>
+          <a:lstStyle/>
+          <a:p>
+            <a:pPr algn="ctr"/>
+            <a:r>
+              <a:rPr sz="800" b="1" i="0">
+                <a:solidFill>
+                  <a:srgbClr val="FFFFFF"/>
+                </a:solidFill>
+                <a:latin typeface="Calibri"/>
+              </a:rPr>
+              <a:t>GET</a:t>
+            </a:r>
+          </a:p>
+        </p:txBody>
+      </p:sp>
+      <p:sp>
+        <p:nvSpPr>
+          <p:cNvPr id="78" name="TextBox 77"/>
+          <p:cNvSpPr txBox="1"/>
+          <p:nvPr/>
+        </p:nvSpPr>
+        <p:spPr>
+          <a:xfrm>
+            <a:off x="1463040" y="6089903"/>
+            <a:ext cx="3931920" cy="274320"/>
+          </a:xfrm>
+          <a:prstGeom prst="rect">
+            <a:avLst/>
+          </a:prstGeom>
+          <a:noFill/>
+        </p:spPr>
+        <p:txBody>
+          <a:bodyPr wrap="square">
+            <a:spAutoFit/>
+          </a:bodyPr>
+          <a:lstStyle/>
+          <a:p>
+            <a:pPr algn="l"/>
+            <a:r>
+              <a:rPr sz="900" b="0" i="0">
+                <a:solidFill>
+                  <a:srgbClr val="0D1B2A"/>
+                </a:solidFill>
+                <a:latin typeface="Consolas"/>
+              </a:rPr>
+              <a:t>/api/feedback</a:t>
+            </a:r>
+          </a:p>
+        </p:txBody>
+      </p:sp>
+      <p:sp>
+        <p:nvSpPr>
+          <p:cNvPr id="79" name="TextBox 78"/>
+          <p:cNvSpPr txBox="1"/>
+          <p:nvPr/>
+        </p:nvSpPr>
+        <p:spPr>
+          <a:xfrm>
+            <a:off x="5577840" y="6089903"/>
+            <a:ext cx="1554480" cy="274320"/>
+          </a:xfrm>
+          <a:prstGeom prst="rect">
+            <a:avLst/>
+          </a:prstGeom>
+          <a:noFill/>
+        </p:spPr>
+        <p:txBody>
+          <a:bodyPr wrap="square">
+            <a:spAutoFit/>
+          </a:bodyPr>
+          <a:lstStyle/>
+          <a:p>
+            <a:pPr algn="l"/>
+            <a:r>
+              <a:rPr sz="900" b="1" i="0">
+                <a:solidFill>
+                  <a:srgbClr val="C0392B"/>
+                </a:solidFill>
+                <a:latin typeface="Calibri"/>
+              </a:rPr>
+              <a:t>Admin</a:t>
+            </a:r>
+          </a:p>
+        </p:txBody>
+      </p:sp>
+      <p:sp>
+        <p:nvSpPr>
+          <p:cNvPr id="80" name="TextBox 79"/>
+          <p:cNvSpPr txBox="1"/>
+          <p:nvPr/>
+        </p:nvSpPr>
+        <p:spPr>
+          <a:xfrm>
+            <a:off x="7178040" y="6089903"/>
+            <a:ext cx="4480560" cy="274320"/>
+          </a:xfrm>
+          <a:prstGeom prst="rect">
+            <a:avLst/>
+          </a:prstGeom>
+          <a:noFill/>
+        </p:spPr>
+        <p:txBody>
+          <a:bodyPr wrap="square">
+            <a:spAutoFit/>
+          </a:bodyPr>
+          <a:lstStyle/>
+          <a:p>
+            <a:pPr algn="l"/>
+            <a:r>
+              <a:rPr sz="900" b="0" i="0">
+                <a:solidFill>
+                  <a:srgbClr val="5C6370"/>
+                </a:solidFill>
+                <a:latin typeface="Calibri"/>
+              </a:rPr>
+              <a:t>Get all feedback (admin)</a:t>
+            </a:r>
+          </a:p>
+        </p:txBody>
+      </p:sp>
+    </p:spTree>
+  </p:cSld>
+  <p:clrMapOvr>
+    <a:masterClrMapping/>
+  </p:clrMapOvr>
+</p:sld>
+</file>
+
+<file path=ppt/slides/slide12.xml><?xml version="1.0" encoding="utf-8"?>
 <p:sld xmlns:a="http://schemas.openxmlformats.org/drawingml/2006/main" xmlns:r="http://schemas.openxmlformats.org/officeDocument/2006/relationships" xmlns:p="http://schemas.openxmlformats.org/presentationml/2006/main">
   <p:cSld>
     <p:bg>
@@ -5221,1922 +8239,36 @@
           </a:p>
         </p:txBody>
       </p:sp>
-      <p:sp>
-        <p:nvSpPr>
-          <p:cNvPr id="5" name="Rectangle 4"/>
-          <p:cNvSpPr/>
-          <p:nvPr/>
-        </p:nvSpPr>
-        <p:spPr>
-          <a:xfrm>
-            <a:off x="365760" y="1234440"/>
-            <a:ext cx="2743200" cy="1371600"/>
-          </a:xfrm>
-          <a:prstGeom prst="rect">
-            <a:avLst/>
-          </a:prstGeom>
-          <a:solidFill>
-            <a:srgbClr val="FFFFFF"/>
-          </a:solidFill>
-          <a:ln w="6350">
-            <a:solidFill>
-              <a:srgbClr val="E0E0E0"/>
-            </a:solidFill>
-          </a:ln>
-        </p:spPr>
-        <p:style>
-          <a:lnRef idx="1">
-            <a:schemeClr val="accent1"/>
-          </a:lnRef>
-          <a:fillRef idx="3">
-            <a:schemeClr val="accent1"/>
-          </a:fillRef>
-          <a:effectRef idx="2">
-            <a:schemeClr val="accent1"/>
-          </a:effectRef>
-          <a:fontRef idx="minor">
-            <a:schemeClr val="lt1"/>
-          </a:fontRef>
-        </p:style>
-        <p:txBody>
-          <a:bodyPr rtlCol="0" anchor="ctr"/>
-          <a:lstStyle/>
-          <a:p>
-            <a:pPr algn="ctr"/>
-            <a:endParaRPr/>
-          </a:p>
-        </p:txBody>
-      </p:sp>
-      <p:sp>
-        <p:nvSpPr>
-          <p:cNvPr id="6" name="Rectangle 5"/>
-          <p:cNvSpPr/>
-          <p:nvPr/>
-        </p:nvSpPr>
-        <p:spPr>
-          <a:xfrm>
-            <a:off x="365760" y="1234440"/>
-            <a:ext cx="2743200" cy="54864"/>
-          </a:xfrm>
-          <a:prstGeom prst="rect">
-            <a:avLst/>
-          </a:prstGeom>
-          <a:solidFill>
-            <a:srgbClr val="2D8C5E"/>
-          </a:solidFill>
-          <a:ln>
-            <a:noFill/>
-          </a:ln>
-        </p:spPr>
-        <p:style>
-          <a:lnRef idx="1">
-            <a:schemeClr val="accent1"/>
-          </a:lnRef>
-          <a:fillRef idx="3">
-            <a:schemeClr val="accent1"/>
-          </a:fillRef>
-          <a:effectRef idx="2">
-            <a:schemeClr val="accent1"/>
-          </a:effectRef>
-          <a:fontRef idx="minor">
-            <a:schemeClr val="lt1"/>
-          </a:fontRef>
-        </p:style>
-        <p:txBody>
-          <a:bodyPr rtlCol="0" anchor="ctr"/>
-          <a:lstStyle/>
-          <a:p>
-            <a:pPr algn="ctr"/>
-            <a:endParaRPr/>
-          </a:p>
-        </p:txBody>
-      </p:sp>
-      <p:sp>
-        <p:nvSpPr>
-          <p:cNvPr id="7" name="TextBox 6"/>
-          <p:cNvSpPr txBox="1"/>
-          <p:nvPr/>
-        </p:nvSpPr>
-        <p:spPr>
-          <a:xfrm>
-            <a:off x="457200" y="1325880"/>
-            <a:ext cx="2560320" cy="658368"/>
-          </a:xfrm>
-          <a:prstGeom prst="rect">
-            <a:avLst/>
-          </a:prstGeom>
-          <a:noFill/>
-        </p:spPr>
-        <p:txBody>
-          <a:bodyPr wrap="square">
-            <a:spAutoFit/>
-          </a:bodyPr>
-          <a:lstStyle/>
-          <a:p>
-            <a:pPr algn="ctr"/>
-            <a:r>
-              <a:rPr sz="3600" b="1" i="0">
-                <a:solidFill>
-                  <a:srgbClr val="2D8C5E"/>
-                </a:solidFill>
-                <a:latin typeface="Georgia"/>
-              </a:rPr>
-              <a:t>12</a:t>
-            </a:r>
-          </a:p>
-        </p:txBody>
-      </p:sp>
-      <p:sp>
-        <p:nvSpPr>
-          <p:cNvPr id="8" name="TextBox 7"/>
-          <p:cNvSpPr txBox="1"/>
-          <p:nvPr/>
-        </p:nvSpPr>
-        <p:spPr>
-          <a:xfrm>
-            <a:off x="457200" y="1920240"/>
-            <a:ext cx="2560320" cy="320040"/>
-          </a:xfrm>
-          <a:prstGeom prst="rect">
-            <a:avLst/>
-          </a:prstGeom>
-          <a:noFill/>
-        </p:spPr>
-        <p:txBody>
-          <a:bodyPr wrap="square">
-            <a:spAutoFit/>
-          </a:bodyPr>
-          <a:lstStyle/>
-          <a:p>
-            <a:pPr algn="ctr"/>
-            <a:r>
-              <a:rPr sz="1100" b="1" i="0">
-                <a:solidFill>
-                  <a:srgbClr val="0D1B2A"/>
-                </a:solidFill>
-                <a:latin typeface="Calibri"/>
-              </a:rPr>
-              <a:t>Unit Tests</a:t>
-            </a:r>
-          </a:p>
-        </p:txBody>
-      </p:sp>
-      <p:sp>
-        <p:nvSpPr>
-          <p:cNvPr id="9" name="TextBox 8"/>
-          <p:cNvSpPr txBox="1"/>
-          <p:nvPr/>
-        </p:nvSpPr>
-        <p:spPr>
-          <a:xfrm>
-            <a:off x="457200" y="2212848"/>
-            <a:ext cx="2560320" cy="274320"/>
-          </a:xfrm>
-          <a:prstGeom prst="rect">
-            <a:avLst/>
-          </a:prstGeom>
-          <a:noFill/>
-        </p:spPr>
-        <p:txBody>
-          <a:bodyPr wrap="square">
-            <a:spAutoFit/>
-          </a:bodyPr>
-          <a:lstStyle/>
-          <a:p>
-            <a:pPr algn="ctr"/>
-            <a:r>
-              <a:rPr sz="900" b="0" i="0">
-                <a:solidFill>
-                  <a:srgbClr val="5C6370"/>
-                </a:solidFill>
-                <a:latin typeface="Calibri"/>
-              </a:rPr>
-              <a:t>100% Pass</a:t>
-            </a:r>
-          </a:p>
-        </p:txBody>
-      </p:sp>
-      <p:sp>
-        <p:nvSpPr>
-          <p:cNvPr id="10" name="Rectangle 9"/>
-          <p:cNvSpPr/>
-          <p:nvPr/>
-        </p:nvSpPr>
-        <p:spPr>
-          <a:xfrm>
-            <a:off x="3291840" y="1234440"/>
-            <a:ext cx="2743200" cy="1371600"/>
-          </a:xfrm>
-          <a:prstGeom prst="rect">
-            <a:avLst/>
-          </a:prstGeom>
-          <a:solidFill>
-            <a:srgbClr val="FFFFFF"/>
-          </a:solidFill>
-          <a:ln w="6350">
-            <a:solidFill>
-              <a:srgbClr val="E0E0E0"/>
-            </a:solidFill>
-          </a:ln>
-        </p:spPr>
-        <p:style>
-          <a:lnRef idx="1">
-            <a:schemeClr val="accent1"/>
-          </a:lnRef>
-          <a:fillRef idx="3">
-            <a:schemeClr val="accent1"/>
-          </a:fillRef>
-          <a:effectRef idx="2">
-            <a:schemeClr val="accent1"/>
-          </a:effectRef>
-          <a:fontRef idx="minor">
-            <a:schemeClr val="lt1"/>
-          </a:fontRef>
-        </p:style>
-        <p:txBody>
-          <a:bodyPr rtlCol="0" anchor="ctr"/>
-          <a:lstStyle/>
-          <a:p>
-            <a:pPr algn="ctr"/>
-            <a:endParaRPr/>
-          </a:p>
-        </p:txBody>
-      </p:sp>
-      <p:sp>
-        <p:nvSpPr>
-          <p:cNvPr id="11" name="Rectangle 10"/>
-          <p:cNvSpPr/>
-          <p:nvPr/>
-        </p:nvSpPr>
-        <p:spPr>
-          <a:xfrm>
-            <a:off x="3291840" y="1234440"/>
-            <a:ext cx="2743200" cy="54864"/>
-          </a:xfrm>
-          <a:prstGeom prst="rect">
-            <a:avLst/>
-          </a:prstGeom>
-          <a:solidFill>
-            <a:srgbClr val="2D8C5E"/>
-          </a:solidFill>
-          <a:ln>
-            <a:noFill/>
-          </a:ln>
-        </p:spPr>
-        <p:style>
-          <a:lnRef idx="1">
-            <a:schemeClr val="accent1"/>
-          </a:lnRef>
-          <a:fillRef idx="3">
-            <a:schemeClr val="accent1"/>
-          </a:fillRef>
-          <a:effectRef idx="2">
-            <a:schemeClr val="accent1"/>
-          </a:effectRef>
-          <a:fontRef idx="minor">
-            <a:schemeClr val="lt1"/>
-          </a:fontRef>
-        </p:style>
-        <p:txBody>
-          <a:bodyPr rtlCol="0" anchor="ctr"/>
-          <a:lstStyle/>
-          <a:p>
-            <a:pPr algn="ctr"/>
-            <a:endParaRPr/>
-          </a:p>
-        </p:txBody>
-      </p:sp>
-      <p:sp>
-        <p:nvSpPr>
-          <p:cNvPr id="12" name="TextBox 11"/>
-          <p:cNvSpPr txBox="1"/>
-          <p:nvPr/>
-        </p:nvSpPr>
-        <p:spPr>
-          <a:xfrm>
-            <a:off x="3383280" y="1325880"/>
-            <a:ext cx="2560320" cy="658368"/>
-          </a:xfrm>
-          <a:prstGeom prst="rect">
-            <a:avLst/>
-          </a:prstGeom>
-          <a:noFill/>
-        </p:spPr>
-        <p:txBody>
-          <a:bodyPr wrap="square">
-            <a:spAutoFit/>
-          </a:bodyPr>
-          <a:lstStyle/>
-          <a:p>
-            <a:pPr algn="ctr"/>
-            <a:r>
-              <a:rPr sz="3600" b="1" i="0">
-                <a:solidFill>
-                  <a:srgbClr val="2D8C5E"/>
-                </a:solidFill>
-                <a:latin typeface="Georgia"/>
-              </a:rPr>
-              <a:t>5</a:t>
-            </a:r>
-          </a:p>
-        </p:txBody>
-      </p:sp>
-      <p:sp>
-        <p:nvSpPr>
-          <p:cNvPr id="13" name="TextBox 12"/>
-          <p:cNvSpPr txBox="1"/>
-          <p:nvPr/>
-        </p:nvSpPr>
-        <p:spPr>
-          <a:xfrm>
-            <a:off x="3383280" y="1920240"/>
-            <a:ext cx="2560320" cy="320040"/>
-          </a:xfrm>
-          <a:prstGeom prst="rect">
-            <a:avLst/>
-          </a:prstGeom>
-          <a:noFill/>
-        </p:spPr>
-        <p:txBody>
-          <a:bodyPr wrap="square">
-            <a:spAutoFit/>
-          </a:bodyPr>
-          <a:lstStyle/>
-          <a:p>
-            <a:pPr algn="ctr"/>
-            <a:r>
-              <a:rPr sz="1100" b="1" i="0">
-                <a:solidFill>
-                  <a:srgbClr val="0D1B2A"/>
-                </a:solidFill>
-                <a:latin typeface="Calibri"/>
-              </a:rPr>
-              <a:t>Integration Tests</a:t>
-            </a:r>
-          </a:p>
-        </p:txBody>
-      </p:sp>
-      <p:sp>
-        <p:nvSpPr>
-          <p:cNvPr id="14" name="TextBox 13"/>
-          <p:cNvSpPr txBox="1"/>
-          <p:nvPr/>
-        </p:nvSpPr>
-        <p:spPr>
-          <a:xfrm>
-            <a:off x="3383280" y="2212848"/>
-            <a:ext cx="2560320" cy="274320"/>
-          </a:xfrm>
-          <a:prstGeom prst="rect">
-            <a:avLst/>
-          </a:prstGeom>
-          <a:noFill/>
-        </p:spPr>
-        <p:txBody>
-          <a:bodyPr wrap="square">
-            <a:spAutoFit/>
-          </a:bodyPr>
-          <a:lstStyle/>
-          <a:p>
-            <a:pPr algn="ctr"/>
-            <a:r>
-              <a:rPr sz="900" b="0" i="0">
-                <a:solidFill>
-                  <a:srgbClr val="5C6370"/>
-                </a:solidFill>
-                <a:latin typeface="Calibri"/>
-              </a:rPr>
-              <a:t>100% Pass</a:t>
-            </a:r>
-          </a:p>
-        </p:txBody>
-      </p:sp>
-      <p:sp>
-        <p:nvSpPr>
-          <p:cNvPr id="15" name="Rectangle 14"/>
-          <p:cNvSpPr/>
-          <p:nvPr/>
-        </p:nvSpPr>
-        <p:spPr>
-          <a:xfrm>
-            <a:off x="6217920" y="1234440"/>
-            <a:ext cx="2743200" cy="1371600"/>
-          </a:xfrm>
-          <a:prstGeom prst="rect">
-            <a:avLst/>
-          </a:prstGeom>
-          <a:solidFill>
-            <a:srgbClr val="FFFFFF"/>
-          </a:solidFill>
-          <a:ln w="6350">
-            <a:solidFill>
-              <a:srgbClr val="E0E0E0"/>
-            </a:solidFill>
-          </a:ln>
-        </p:spPr>
-        <p:style>
-          <a:lnRef idx="1">
-            <a:schemeClr val="accent1"/>
-          </a:lnRef>
-          <a:fillRef idx="3">
-            <a:schemeClr val="accent1"/>
-          </a:fillRef>
-          <a:effectRef idx="2">
-            <a:schemeClr val="accent1"/>
-          </a:effectRef>
-          <a:fontRef idx="minor">
-            <a:schemeClr val="lt1"/>
-          </a:fontRef>
-        </p:style>
-        <p:txBody>
-          <a:bodyPr rtlCol="0" anchor="ctr"/>
-          <a:lstStyle/>
-          <a:p>
-            <a:pPr algn="ctr"/>
-            <a:endParaRPr/>
-          </a:p>
-        </p:txBody>
-      </p:sp>
-      <p:sp>
-        <p:nvSpPr>
-          <p:cNvPr id="16" name="Rectangle 15"/>
-          <p:cNvSpPr/>
-          <p:nvPr/>
-        </p:nvSpPr>
-        <p:spPr>
-          <a:xfrm>
-            <a:off x="6217920" y="1234440"/>
-            <a:ext cx="2743200" cy="54864"/>
-          </a:xfrm>
-          <a:prstGeom prst="rect">
-            <a:avLst/>
-          </a:prstGeom>
-          <a:solidFill>
-            <a:srgbClr val="2D8C5E"/>
-          </a:solidFill>
-          <a:ln>
-            <a:noFill/>
-          </a:ln>
-        </p:spPr>
-        <p:style>
-          <a:lnRef idx="1">
-            <a:schemeClr val="accent1"/>
-          </a:lnRef>
-          <a:fillRef idx="3">
-            <a:schemeClr val="accent1"/>
-          </a:fillRef>
-          <a:effectRef idx="2">
-            <a:schemeClr val="accent1"/>
-          </a:effectRef>
-          <a:fontRef idx="minor">
-            <a:schemeClr val="lt1"/>
-          </a:fontRef>
-        </p:style>
-        <p:txBody>
-          <a:bodyPr rtlCol="0" anchor="ctr"/>
-          <a:lstStyle/>
-          <a:p>
-            <a:pPr algn="ctr"/>
-            <a:endParaRPr/>
-          </a:p>
-        </p:txBody>
-      </p:sp>
-      <p:sp>
-        <p:nvSpPr>
-          <p:cNvPr id="17" name="TextBox 16"/>
-          <p:cNvSpPr txBox="1"/>
-          <p:nvPr/>
-        </p:nvSpPr>
-        <p:spPr>
-          <a:xfrm>
-            <a:off x="6309360" y="1325880"/>
-            <a:ext cx="2560320" cy="658368"/>
-          </a:xfrm>
-          <a:prstGeom prst="rect">
-            <a:avLst/>
-          </a:prstGeom>
-          <a:noFill/>
-        </p:spPr>
-        <p:txBody>
-          <a:bodyPr wrap="square">
-            <a:spAutoFit/>
-          </a:bodyPr>
-          <a:lstStyle/>
-          <a:p>
-            <a:pPr algn="ctr"/>
-            <a:r>
-              <a:rPr sz="3600" b="1" i="0">
-                <a:solidFill>
-                  <a:srgbClr val="2D8C5E"/>
-                </a:solidFill>
-                <a:latin typeface="Georgia"/>
-              </a:rPr>
-              <a:t>17</a:t>
-            </a:r>
-          </a:p>
-        </p:txBody>
-      </p:sp>
-      <p:sp>
-        <p:nvSpPr>
-          <p:cNvPr id="18" name="TextBox 17"/>
-          <p:cNvSpPr txBox="1"/>
-          <p:nvPr/>
-        </p:nvSpPr>
-        <p:spPr>
-          <a:xfrm>
-            <a:off x="6309360" y="1920240"/>
-            <a:ext cx="2560320" cy="320040"/>
-          </a:xfrm>
-          <a:prstGeom prst="rect">
-            <a:avLst/>
-          </a:prstGeom>
-          <a:noFill/>
-        </p:spPr>
-        <p:txBody>
-          <a:bodyPr wrap="square">
-            <a:spAutoFit/>
-          </a:bodyPr>
-          <a:lstStyle/>
-          <a:p>
-            <a:pPr algn="ctr"/>
-            <a:r>
-              <a:rPr sz="1100" b="1" i="0">
-                <a:solidFill>
-                  <a:srgbClr val="0D1B2A"/>
-                </a:solidFill>
-                <a:latin typeface="Calibri"/>
-              </a:rPr>
-              <a:t>Total Tests</a:t>
-            </a:r>
-          </a:p>
-        </p:txBody>
-      </p:sp>
-      <p:sp>
-        <p:nvSpPr>
-          <p:cNvPr id="19" name="TextBox 18"/>
-          <p:cNvSpPr txBox="1"/>
-          <p:nvPr/>
-        </p:nvSpPr>
-        <p:spPr>
-          <a:xfrm>
-            <a:off x="6309360" y="2212848"/>
-            <a:ext cx="2560320" cy="274320"/>
-          </a:xfrm>
-          <a:prstGeom prst="rect">
-            <a:avLst/>
-          </a:prstGeom>
-          <a:noFill/>
-        </p:spPr>
-        <p:txBody>
-          <a:bodyPr wrap="square">
-            <a:spAutoFit/>
-          </a:bodyPr>
-          <a:lstStyle/>
-          <a:p>
-            <a:pPr algn="ctr"/>
-            <a:r>
-              <a:rPr sz="900" b="0" i="0">
-                <a:solidFill>
-                  <a:srgbClr val="5C6370"/>
-                </a:solidFill>
-                <a:latin typeface="Calibri"/>
-              </a:rPr>
-              <a:t>All Passing ✓</a:t>
-            </a:r>
-          </a:p>
-        </p:txBody>
-      </p:sp>
-      <p:sp>
-        <p:nvSpPr>
-          <p:cNvPr id="20" name="Rectangle 19"/>
-          <p:cNvSpPr/>
-          <p:nvPr/>
-        </p:nvSpPr>
-        <p:spPr>
-          <a:xfrm>
-            <a:off x="9144000" y="1234440"/>
-            <a:ext cx="2743200" cy="1371600"/>
-          </a:xfrm>
-          <a:prstGeom prst="rect">
-            <a:avLst/>
-          </a:prstGeom>
-          <a:solidFill>
-            <a:srgbClr val="FFFFFF"/>
-          </a:solidFill>
-          <a:ln w="6350">
-            <a:solidFill>
-              <a:srgbClr val="E0E0E0"/>
-            </a:solidFill>
-          </a:ln>
-        </p:spPr>
-        <p:style>
-          <a:lnRef idx="1">
-            <a:schemeClr val="accent1"/>
-          </a:lnRef>
-          <a:fillRef idx="3">
-            <a:schemeClr val="accent1"/>
-          </a:fillRef>
-          <a:effectRef idx="2">
-            <a:schemeClr val="accent1"/>
-          </a:effectRef>
-          <a:fontRef idx="minor">
-            <a:schemeClr val="lt1"/>
-          </a:fontRef>
-        </p:style>
-        <p:txBody>
-          <a:bodyPr rtlCol="0" anchor="ctr"/>
-          <a:lstStyle/>
-          <a:p>
-            <a:pPr algn="ctr"/>
-            <a:endParaRPr/>
-          </a:p>
-        </p:txBody>
-      </p:sp>
-      <p:sp>
-        <p:nvSpPr>
-          <p:cNvPr id="21" name="Rectangle 20"/>
-          <p:cNvSpPr/>
-          <p:nvPr/>
-        </p:nvSpPr>
-        <p:spPr>
-          <a:xfrm>
-            <a:off x="9144000" y="1234440"/>
-            <a:ext cx="2743200" cy="54864"/>
-          </a:xfrm>
-          <a:prstGeom prst="rect">
-            <a:avLst/>
-          </a:prstGeom>
-          <a:solidFill>
-            <a:srgbClr val="C9A84C"/>
-          </a:solidFill>
-          <a:ln>
-            <a:noFill/>
-          </a:ln>
-        </p:spPr>
-        <p:style>
-          <a:lnRef idx="1">
-            <a:schemeClr val="accent1"/>
-          </a:lnRef>
-          <a:fillRef idx="3">
-            <a:schemeClr val="accent1"/>
-          </a:fillRef>
-          <a:effectRef idx="2">
-            <a:schemeClr val="accent1"/>
-          </a:effectRef>
-          <a:fontRef idx="minor">
-            <a:schemeClr val="lt1"/>
-          </a:fontRef>
-        </p:style>
-        <p:txBody>
-          <a:bodyPr rtlCol="0" anchor="ctr"/>
-          <a:lstStyle/>
-          <a:p>
-            <a:pPr algn="ctr"/>
-            <a:endParaRPr/>
-          </a:p>
-        </p:txBody>
-      </p:sp>
-      <p:sp>
-        <p:nvSpPr>
-          <p:cNvPr id="22" name="TextBox 21"/>
-          <p:cNvSpPr txBox="1"/>
-          <p:nvPr/>
-        </p:nvSpPr>
-        <p:spPr>
-          <a:xfrm>
-            <a:off x="9235440" y="1325880"/>
-            <a:ext cx="2560320" cy="658368"/>
-          </a:xfrm>
-          <a:prstGeom prst="rect">
-            <a:avLst/>
-          </a:prstGeom>
-          <a:noFill/>
-        </p:spPr>
-        <p:txBody>
-          <a:bodyPr wrap="square">
-            <a:spAutoFit/>
-          </a:bodyPr>
-          <a:lstStyle/>
-          <a:p>
-            <a:pPr algn="ctr"/>
-            <a:r>
-              <a:rPr sz="3600" b="1" i="0">
-                <a:solidFill>
-                  <a:srgbClr val="C9A84C"/>
-                </a:solidFill>
-                <a:latin typeface="Georgia"/>
-              </a:rPr>
-              <a:t>3</a:t>
-            </a:r>
-          </a:p>
-        </p:txBody>
-      </p:sp>
-      <p:sp>
-        <p:nvSpPr>
-          <p:cNvPr id="23" name="TextBox 22"/>
-          <p:cNvSpPr txBox="1"/>
-          <p:nvPr/>
-        </p:nvSpPr>
-        <p:spPr>
-          <a:xfrm>
-            <a:off x="9235440" y="1920240"/>
-            <a:ext cx="2560320" cy="320040"/>
-          </a:xfrm>
-          <a:prstGeom prst="rect">
-            <a:avLst/>
-          </a:prstGeom>
-          <a:noFill/>
-        </p:spPr>
-        <p:txBody>
-          <a:bodyPr wrap="square">
-            <a:spAutoFit/>
-          </a:bodyPr>
-          <a:lstStyle/>
-          <a:p>
-            <a:pPr algn="ctr"/>
-            <a:r>
-              <a:rPr sz="1100" b="1" i="0">
-                <a:solidFill>
-                  <a:srgbClr val="0D1B2A"/>
-                </a:solidFill>
-                <a:latin typeface="Calibri"/>
-              </a:rPr>
-              <a:t>Test Suites</a:t>
-            </a:r>
-          </a:p>
-        </p:txBody>
-      </p:sp>
-      <p:sp>
-        <p:nvSpPr>
-          <p:cNvPr id="24" name="TextBox 23"/>
-          <p:cNvSpPr txBox="1"/>
-          <p:nvPr/>
-        </p:nvSpPr>
-        <p:spPr>
-          <a:xfrm>
-            <a:off x="9235440" y="2212848"/>
-            <a:ext cx="2560320" cy="274320"/>
-          </a:xfrm>
-          <a:prstGeom prst="rect">
-            <a:avLst/>
-          </a:prstGeom>
-          <a:noFill/>
-        </p:spPr>
-        <p:txBody>
-          <a:bodyPr wrap="square">
-            <a:spAutoFit/>
-          </a:bodyPr>
-          <a:lstStyle/>
-          <a:p>
-            <a:pPr algn="ctr"/>
-            <a:r>
-              <a:rPr sz="900" b="0" i="0">
-                <a:solidFill>
-                  <a:srgbClr val="5C6370"/>
-                </a:solidFill>
-                <a:latin typeface="Calibri"/>
-              </a:rPr>
-              <a:t>auth · session · feedback</a:t>
-            </a:r>
-          </a:p>
-        </p:txBody>
-      </p:sp>
-      <p:sp>
-        <p:nvSpPr>
-          <p:cNvPr id="25" name="Rectangle 24"/>
-          <p:cNvSpPr/>
-          <p:nvPr/>
-        </p:nvSpPr>
-        <p:spPr>
-          <a:xfrm>
-            <a:off x="365760" y="2788920"/>
-            <a:ext cx="5577840" cy="3794760"/>
-          </a:xfrm>
-          <a:prstGeom prst="rect">
-            <a:avLst/>
-          </a:prstGeom>
-          <a:solidFill>
-            <a:srgbClr val="FFFFFF"/>
-          </a:solidFill>
-          <a:ln w="6350">
-            <a:solidFill>
-              <a:srgbClr val="E0E0E0"/>
-            </a:solidFill>
-          </a:ln>
-        </p:spPr>
-        <p:style>
-          <a:lnRef idx="1">
-            <a:schemeClr val="accent1"/>
-          </a:lnRef>
-          <a:fillRef idx="3">
-            <a:schemeClr val="accent1"/>
-          </a:fillRef>
-          <a:effectRef idx="2">
-            <a:schemeClr val="accent1"/>
-          </a:effectRef>
-          <a:fontRef idx="minor">
-            <a:schemeClr val="lt1"/>
-          </a:fontRef>
-        </p:style>
-        <p:txBody>
-          <a:bodyPr rtlCol="0" anchor="ctr"/>
-          <a:lstStyle/>
-          <a:p>
-            <a:pPr algn="ctr"/>
-            <a:endParaRPr/>
-          </a:p>
-        </p:txBody>
-      </p:sp>
-      <p:sp>
-        <p:nvSpPr>
-          <p:cNvPr id="26" name="Rectangle 25"/>
-          <p:cNvSpPr/>
-          <p:nvPr/>
-        </p:nvSpPr>
-        <p:spPr>
-          <a:xfrm>
-            <a:off x="365760" y="2788920"/>
-            <a:ext cx="5577840" cy="365760"/>
-          </a:xfrm>
-          <a:prstGeom prst="rect">
-            <a:avLst/>
-          </a:prstGeom>
-          <a:solidFill>
-            <a:srgbClr val="0D1B2A"/>
-          </a:solidFill>
-          <a:ln>
-            <a:noFill/>
-          </a:ln>
-        </p:spPr>
-        <p:style>
-          <a:lnRef idx="1">
-            <a:schemeClr val="accent1"/>
-          </a:lnRef>
-          <a:fillRef idx="3">
-            <a:schemeClr val="accent1"/>
-          </a:fillRef>
-          <a:effectRef idx="2">
-            <a:schemeClr val="accent1"/>
-          </a:effectRef>
-          <a:fontRef idx="minor">
-            <a:schemeClr val="lt1"/>
-          </a:fontRef>
-        </p:style>
-        <p:txBody>
-          <a:bodyPr rtlCol="0" anchor="ctr"/>
-          <a:lstStyle/>
-          <a:p>
-            <a:pPr algn="ctr"/>
-            <a:endParaRPr/>
-          </a:p>
-        </p:txBody>
-      </p:sp>
-      <p:sp>
-        <p:nvSpPr>
-          <p:cNvPr id="27" name="TextBox 26"/>
-          <p:cNvSpPr txBox="1"/>
-          <p:nvPr/>
-        </p:nvSpPr>
-        <p:spPr>
-          <a:xfrm>
-            <a:off x="502920" y="2816352"/>
-            <a:ext cx="5303520" cy="320040"/>
-          </a:xfrm>
-          <a:prstGeom prst="rect">
-            <a:avLst/>
-          </a:prstGeom>
-          <a:noFill/>
-        </p:spPr>
-        <p:txBody>
-          <a:bodyPr wrap="square">
-            <a:spAutoFit/>
-          </a:bodyPr>
-          <a:lstStyle/>
-          <a:p>
-            <a:pPr algn="l"/>
-            <a:r>
-              <a:rPr sz="1100" b="1" i="0">
-                <a:solidFill>
-                  <a:srgbClr val="FFFFFF"/>
-                </a:solidFill>
-                <a:latin typeface="Calibri"/>
-              </a:rPr>
-              <a:t>Unit Tests  (npx jest tests/unit/ --verbose)</a:t>
-            </a:r>
-          </a:p>
-        </p:txBody>
-      </p:sp>
-      <p:sp>
-        <p:nvSpPr>
-          <p:cNvPr id="28" name="TextBox 27"/>
-          <p:cNvSpPr txBox="1"/>
-          <p:nvPr/>
-        </p:nvSpPr>
-        <p:spPr>
-          <a:xfrm>
-            <a:off x="502920" y="3246120"/>
-            <a:ext cx="5303520" cy="320040"/>
-          </a:xfrm>
-          <a:prstGeom prst="rect">
-            <a:avLst/>
-          </a:prstGeom>
-          <a:noFill/>
-        </p:spPr>
-        <p:txBody>
-          <a:bodyPr wrap="square">
-            <a:spAutoFit/>
-          </a:bodyPr>
-          <a:lstStyle/>
-          <a:p>
-            <a:pPr algn="l"/>
-            <a:r>
-              <a:rPr sz="1000" b="1" i="0">
-                <a:solidFill>
-                  <a:srgbClr val="C9A84C"/>
-                </a:solidFill>
-                <a:latin typeface="Calibri"/>
-              </a:rPr>
-              <a:t>auth.test.js</a:t>
-            </a:r>
-          </a:p>
-        </p:txBody>
-      </p:sp>
-      <p:sp>
-        <p:nvSpPr>
-          <p:cNvPr id="29" name="TextBox 28"/>
-          <p:cNvSpPr txBox="1"/>
-          <p:nvPr/>
-        </p:nvSpPr>
-        <p:spPr>
-          <a:xfrm>
-            <a:off x="594360" y="3566160"/>
-            <a:ext cx="5120640" cy="256032"/>
-          </a:xfrm>
-          <a:prstGeom prst="rect">
-            <a:avLst/>
-          </a:prstGeom>
-          <a:noFill/>
-        </p:spPr>
-        <p:txBody>
-          <a:bodyPr wrap="square">
-            <a:spAutoFit/>
-          </a:bodyPr>
-          <a:lstStyle/>
-          <a:p>
-            <a:pPr algn="l"/>
-            <a:r>
-              <a:rPr sz="900" b="0" i="0">
-                <a:solidFill>
-                  <a:srgbClr val="5C6370"/>
-                </a:solidFill>
-                <a:latin typeface="Calibri"/>
-              </a:rPr>
-              <a:t>✓  generateToken returns a string</a:t>
-            </a:r>
-          </a:p>
-        </p:txBody>
-      </p:sp>
-      <p:sp>
-        <p:nvSpPr>
-          <p:cNvPr id="30" name="TextBox 29"/>
-          <p:cNvSpPr txBox="1"/>
-          <p:nvPr/>
-        </p:nvSpPr>
-        <p:spPr>
-          <a:xfrm>
-            <a:off x="594360" y="3794760"/>
-            <a:ext cx="5120640" cy="256032"/>
-          </a:xfrm>
-          <a:prstGeom prst="rect">
-            <a:avLst/>
-          </a:prstGeom>
-          <a:noFill/>
-        </p:spPr>
-        <p:txBody>
-          <a:bodyPr wrap="square">
-            <a:spAutoFit/>
-          </a:bodyPr>
-          <a:lstStyle/>
-          <a:p>
-            <a:pPr algn="l"/>
-            <a:r>
-              <a:rPr sz="900" b="0" i="0">
-                <a:solidFill>
-                  <a:srgbClr val="5C6370"/>
-                </a:solidFill>
-                <a:latin typeface="Calibri"/>
-              </a:rPr>
-              <a:t>✓  bcrypt hash verifies correctly</a:t>
-            </a:r>
-          </a:p>
-        </p:txBody>
-      </p:sp>
-      <p:sp>
-        <p:nvSpPr>
-          <p:cNvPr id="31" name="TextBox 30"/>
-          <p:cNvSpPr txBox="1"/>
-          <p:nvPr/>
-        </p:nvSpPr>
-        <p:spPr>
-          <a:xfrm>
-            <a:off x="594360" y="4023360"/>
-            <a:ext cx="5120640" cy="256032"/>
-          </a:xfrm>
-          <a:prstGeom prst="rect">
-            <a:avLst/>
-          </a:prstGeom>
-          <a:noFill/>
-        </p:spPr>
-        <p:txBody>
-          <a:bodyPr wrap="square">
-            <a:spAutoFit/>
-          </a:bodyPr>
-          <a:lstStyle/>
-          <a:p>
-            <a:pPr algn="l"/>
-            <a:r>
-              <a:rPr sz="900" b="0" i="0">
-                <a:solidFill>
-                  <a:srgbClr val="5C6370"/>
-                </a:solidFill>
-                <a:latin typeface="Calibri"/>
-              </a:rPr>
-              <a:t>✓  bcrypt rejects wrong password</a:t>
-            </a:r>
-          </a:p>
-        </p:txBody>
-      </p:sp>
-      <p:sp>
-        <p:nvSpPr>
-          <p:cNvPr id="32" name="TextBox 31"/>
-          <p:cNvSpPr txBox="1"/>
-          <p:nvPr/>
-        </p:nvSpPr>
-        <p:spPr>
-          <a:xfrm>
-            <a:off x="502920" y="4343400"/>
-            <a:ext cx="5303520" cy="320040"/>
-          </a:xfrm>
-          <a:prstGeom prst="rect">
-            <a:avLst/>
-          </a:prstGeom>
-          <a:noFill/>
-        </p:spPr>
-        <p:txBody>
-          <a:bodyPr wrap="square">
-            <a:spAutoFit/>
-          </a:bodyPr>
-          <a:lstStyle/>
-          <a:p>
-            <a:pPr algn="l"/>
-            <a:r>
-              <a:rPr sz="1000" b="1" i="0">
-                <a:solidFill>
-                  <a:srgbClr val="C9A84C"/>
-                </a:solidFill>
-                <a:latin typeface="Calibri"/>
-              </a:rPr>
-              <a:t>session.test.js</a:t>
-            </a:r>
-          </a:p>
-        </p:txBody>
-      </p:sp>
-      <p:sp>
-        <p:nvSpPr>
-          <p:cNvPr id="33" name="TextBox 32"/>
-          <p:cNvSpPr txBox="1"/>
-          <p:nvPr/>
-        </p:nvSpPr>
-        <p:spPr>
-          <a:xfrm>
-            <a:off x="594360" y="4663440"/>
-            <a:ext cx="5120640" cy="256032"/>
-          </a:xfrm>
-          <a:prstGeom prst="rect">
-            <a:avLst/>
-          </a:prstGeom>
-          <a:noFill/>
-        </p:spPr>
-        <p:txBody>
-          <a:bodyPr wrap="square">
-            <a:spAutoFit/>
-          </a:bodyPr>
-          <a:lstStyle/>
-          <a:p>
-            <a:pPr algn="l"/>
-            <a:r>
-              <a:rPr sz="900" b="0" i="0">
-                <a:solidFill>
-                  <a:srgbClr val="5C6370"/>
-                </a:solidFill>
-                <a:latin typeface="Calibri"/>
-              </a:rPr>
-              <a:t>✓  pending can be accepted</a:t>
-            </a:r>
-          </a:p>
-        </p:txBody>
-      </p:sp>
-      <p:sp>
-        <p:nvSpPr>
-          <p:cNvPr id="34" name="TextBox 33"/>
-          <p:cNvSpPr txBox="1"/>
-          <p:nvPr/>
-        </p:nvSpPr>
-        <p:spPr>
-          <a:xfrm>
-            <a:off x="594360" y="4892040"/>
-            <a:ext cx="5120640" cy="256032"/>
-          </a:xfrm>
-          <a:prstGeom prst="rect">
-            <a:avLst/>
-          </a:prstGeom>
-          <a:noFill/>
-        </p:spPr>
-        <p:txBody>
-          <a:bodyPr wrap="square">
-            <a:spAutoFit/>
-          </a:bodyPr>
-          <a:lstStyle/>
-          <a:p>
-            <a:pPr algn="l"/>
-            <a:r>
-              <a:rPr sz="900" b="0" i="0">
-                <a:solidFill>
-                  <a:srgbClr val="5C6370"/>
-                </a:solidFill>
-                <a:latin typeface="Calibri"/>
-              </a:rPr>
-              <a:t>✓  pending can be declined</a:t>
-            </a:r>
-          </a:p>
-        </p:txBody>
-      </p:sp>
-      <p:sp>
-        <p:nvSpPr>
-          <p:cNvPr id="35" name="TextBox 34"/>
-          <p:cNvSpPr txBox="1"/>
-          <p:nvPr/>
-        </p:nvSpPr>
-        <p:spPr>
-          <a:xfrm>
-            <a:off x="594360" y="5120640"/>
-            <a:ext cx="5120640" cy="256032"/>
-          </a:xfrm>
-          <a:prstGeom prst="rect">
-            <a:avLst/>
-          </a:prstGeom>
-          <a:noFill/>
-        </p:spPr>
-        <p:txBody>
-          <a:bodyPr wrap="square">
-            <a:spAutoFit/>
-          </a:bodyPr>
-          <a:lstStyle/>
-          <a:p>
-            <a:pPr algn="l"/>
-            <a:r>
-              <a:rPr sz="900" b="0" i="0">
-                <a:solidFill>
-                  <a:srgbClr val="5C6370"/>
-                </a:solidFill>
-                <a:latin typeface="Calibri"/>
-              </a:rPr>
-              <a:t>✓  accepted can be completed</a:t>
-            </a:r>
-          </a:p>
-        </p:txBody>
-      </p:sp>
-      <p:sp>
-        <p:nvSpPr>
-          <p:cNvPr id="36" name="TextBox 35"/>
-          <p:cNvSpPr txBox="1"/>
-          <p:nvPr/>
-        </p:nvSpPr>
-        <p:spPr>
-          <a:xfrm>
-            <a:off x="594360" y="5349240"/>
-            <a:ext cx="5120640" cy="256032"/>
-          </a:xfrm>
-          <a:prstGeom prst="rect">
-            <a:avLst/>
-          </a:prstGeom>
-          <a:noFill/>
-        </p:spPr>
-        <p:txBody>
-          <a:bodyPr wrap="square">
-            <a:spAutoFit/>
-          </a:bodyPr>
-          <a:lstStyle/>
-          <a:p>
-            <a:pPr algn="l"/>
-            <a:r>
-              <a:rPr sz="900" b="0" i="0">
-                <a:solidFill>
-                  <a:srgbClr val="5C6370"/>
-                </a:solidFill>
-                <a:latin typeface="Calibri"/>
-              </a:rPr>
-              <a:t>✓  completed cannot be changed</a:t>
-            </a:r>
-          </a:p>
-        </p:txBody>
-      </p:sp>
-      <p:sp>
-        <p:nvSpPr>
-          <p:cNvPr id="37" name="TextBox 36"/>
-          <p:cNvSpPr txBox="1"/>
-          <p:nvPr/>
-        </p:nvSpPr>
-        <p:spPr>
-          <a:xfrm>
-            <a:off x="502920" y="5440679"/>
-            <a:ext cx="5303520" cy="320040"/>
-          </a:xfrm>
-          <a:prstGeom prst="rect">
-            <a:avLst/>
-          </a:prstGeom>
-          <a:noFill/>
-        </p:spPr>
-        <p:txBody>
-          <a:bodyPr wrap="square">
-            <a:spAutoFit/>
-          </a:bodyPr>
-          <a:lstStyle/>
-          <a:p>
-            <a:pPr algn="l"/>
-            <a:r>
-              <a:rPr sz="1000" b="1" i="0">
-                <a:solidFill>
-                  <a:srgbClr val="C9A84C"/>
-                </a:solidFill>
-                <a:latin typeface="Calibri"/>
-              </a:rPr>
-              <a:t>feedback.test.js</a:t>
-            </a:r>
-          </a:p>
-        </p:txBody>
-      </p:sp>
-      <p:sp>
-        <p:nvSpPr>
-          <p:cNvPr id="38" name="TextBox 37"/>
-          <p:cNvSpPr txBox="1"/>
-          <p:nvPr/>
-        </p:nvSpPr>
-        <p:spPr>
-          <a:xfrm>
-            <a:off x="594360" y="5760719"/>
-            <a:ext cx="5120640" cy="256032"/>
-          </a:xfrm>
-          <a:prstGeom prst="rect">
-            <a:avLst/>
-          </a:prstGeom>
-          <a:noFill/>
-        </p:spPr>
-        <p:txBody>
-          <a:bodyPr wrap="square">
-            <a:spAutoFit/>
-          </a:bodyPr>
-          <a:lstStyle/>
-          <a:p>
-            <a:pPr algn="l"/>
-            <a:r>
-              <a:rPr sz="900" b="0" i="0">
-                <a:solidFill>
-                  <a:srgbClr val="5C6370"/>
-                </a:solidFill>
-                <a:latin typeface="Calibri"/>
-              </a:rPr>
-              <a:t>✓  valid feedback passes</a:t>
-            </a:r>
-          </a:p>
-        </p:txBody>
-      </p:sp>
-      <p:sp>
-        <p:nvSpPr>
-          <p:cNvPr id="39" name="TextBox 38"/>
-          <p:cNvSpPr txBox="1"/>
-          <p:nvPr/>
-        </p:nvSpPr>
-        <p:spPr>
-          <a:xfrm>
-            <a:off x="594360" y="5989319"/>
-            <a:ext cx="5120640" cy="256032"/>
-          </a:xfrm>
-          <a:prstGeom prst="rect">
-            <a:avLst/>
-          </a:prstGeom>
-          <a:noFill/>
-        </p:spPr>
-        <p:txBody>
-          <a:bodyPr wrap="square">
-            <a:spAutoFit/>
-          </a:bodyPr>
-          <a:lstStyle/>
-          <a:p>
-            <a:pPr algn="l"/>
-            <a:r>
-              <a:rPr sz="900" b="0" i="0">
-                <a:solidFill>
-                  <a:srgbClr val="5C6370"/>
-                </a:solidFill>
-                <a:latin typeface="Calibri"/>
-              </a:rPr>
-              <a:t>✓  missing session_id fails</a:t>
-            </a:r>
-          </a:p>
-        </p:txBody>
-      </p:sp>
-      <p:sp>
-        <p:nvSpPr>
-          <p:cNvPr id="40" name="TextBox 39"/>
-          <p:cNvSpPr txBox="1"/>
-          <p:nvPr/>
-        </p:nvSpPr>
-        <p:spPr>
-          <a:xfrm>
-            <a:off x="594360" y="6217919"/>
-            <a:ext cx="5120640" cy="256032"/>
-          </a:xfrm>
-          <a:prstGeom prst="rect">
-            <a:avLst/>
-          </a:prstGeom>
-          <a:noFill/>
-        </p:spPr>
-        <p:txBody>
-          <a:bodyPr wrap="square">
-            <a:spAutoFit/>
-          </a:bodyPr>
-          <a:lstStyle/>
-          <a:p>
-            <a:pPr algn="l"/>
-            <a:r>
-              <a:rPr sz="900" b="0" i="0">
-                <a:solidFill>
-                  <a:srgbClr val="5C6370"/>
-                </a:solidFill>
-                <a:latin typeface="Calibri"/>
-              </a:rPr>
-              <a:t>✓  rating out of range fails</a:t>
-            </a:r>
-          </a:p>
-        </p:txBody>
-      </p:sp>
-      <p:sp>
-        <p:nvSpPr>
-          <p:cNvPr id="41" name="TextBox 40"/>
-          <p:cNvSpPr txBox="1"/>
-          <p:nvPr/>
-        </p:nvSpPr>
-        <p:spPr>
-          <a:xfrm>
-            <a:off x="594360" y="6446519"/>
-            <a:ext cx="5120640" cy="256032"/>
-          </a:xfrm>
-          <a:prstGeom prst="rect">
-            <a:avLst/>
-          </a:prstGeom>
-          <a:noFill/>
-        </p:spPr>
-        <p:txBody>
-          <a:bodyPr wrap="square">
-            <a:spAutoFit/>
-          </a:bodyPr>
-          <a:lstStyle/>
-          <a:p>
-            <a:pPr algn="l"/>
-            <a:r>
-              <a:rPr sz="900" b="0" i="0">
-                <a:solidFill>
-                  <a:srgbClr val="5C6370"/>
-                </a:solidFill>
-                <a:latin typeface="Calibri"/>
-              </a:rPr>
-              <a:t>✓  missing rating fails</a:t>
-            </a:r>
-          </a:p>
-        </p:txBody>
-      </p:sp>
-      <p:sp>
-        <p:nvSpPr>
-          <p:cNvPr id="42" name="Rectangle 41"/>
-          <p:cNvSpPr/>
-          <p:nvPr/>
-        </p:nvSpPr>
-        <p:spPr>
-          <a:xfrm>
-            <a:off x="6172200" y="2788920"/>
-            <a:ext cx="5577840" cy="3794760"/>
-          </a:xfrm>
-          <a:prstGeom prst="rect">
-            <a:avLst/>
-          </a:prstGeom>
-          <a:solidFill>
-            <a:srgbClr val="FFFFFF"/>
-          </a:solidFill>
-          <a:ln w="6350">
-            <a:solidFill>
-              <a:srgbClr val="E0E0E0"/>
-            </a:solidFill>
-          </a:ln>
-        </p:spPr>
-        <p:style>
-          <a:lnRef idx="1">
-            <a:schemeClr val="accent1"/>
-          </a:lnRef>
-          <a:fillRef idx="3">
-            <a:schemeClr val="accent1"/>
-          </a:fillRef>
-          <a:effectRef idx="2">
-            <a:schemeClr val="accent1"/>
-          </a:effectRef>
-          <a:fontRef idx="minor">
-            <a:schemeClr val="lt1"/>
-          </a:fontRef>
-        </p:style>
-        <p:txBody>
-          <a:bodyPr rtlCol="0" anchor="ctr"/>
-          <a:lstStyle/>
-          <a:p>
-            <a:pPr algn="ctr"/>
-            <a:endParaRPr/>
-          </a:p>
-        </p:txBody>
-      </p:sp>
-      <p:sp>
-        <p:nvSpPr>
-          <p:cNvPr id="43" name="Rectangle 42"/>
-          <p:cNvSpPr/>
-          <p:nvPr/>
-        </p:nvSpPr>
-        <p:spPr>
-          <a:xfrm>
-            <a:off x="6172200" y="2788920"/>
-            <a:ext cx="5577840" cy="365760"/>
-          </a:xfrm>
-          <a:prstGeom prst="rect">
-            <a:avLst/>
-          </a:prstGeom>
-          <a:solidFill>
-            <a:srgbClr val="2D6A4F"/>
-          </a:solidFill>
-          <a:ln>
-            <a:noFill/>
-          </a:ln>
-        </p:spPr>
-        <p:style>
-          <a:lnRef idx="1">
-            <a:schemeClr val="accent1"/>
-          </a:lnRef>
-          <a:fillRef idx="3">
-            <a:schemeClr val="accent1"/>
-          </a:fillRef>
-          <a:effectRef idx="2">
-            <a:schemeClr val="accent1"/>
-          </a:effectRef>
-          <a:fontRef idx="minor">
-            <a:schemeClr val="lt1"/>
-          </a:fontRef>
-        </p:style>
-        <p:txBody>
-          <a:bodyPr rtlCol="0" anchor="ctr"/>
-          <a:lstStyle/>
-          <a:p>
-            <a:pPr algn="ctr"/>
-            <a:endParaRPr/>
-          </a:p>
-        </p:txBody>
-      </p:sp>
-      <p:sp>
-        <p:nvSpPr>
-          <p:cNvPr id="44" name="TextBox 43"/>
-          <p:cNvSpPr txBox="1"/>
-          <p:nvPr/>
-        </p:nvSpPr>
-        <p:spPr>
-          <a:xfrm>
-            <a:off x="6309360" y="2816352"/>
-            <a:ext cx="5303520" cy="320040"/>
-          </a:xfrm>
-          <a:prstGeom prst="rect">
-            <a:avLst/>
-          </a:prstGeom>
-          <a:noFill/>
-        </p:spPr>
-        <p:txBody>
-          <a:bodyPr wrap="square">
-            <a:spAutoFit/>
-          </a:bodyPr>
-          <a:lstStyle/>
-          <a:p>
-            <a:pPr algn="l"/>
-            <a:r>
-              <a:rPr sz="1100" b="1" i="0">
-                <a:solidFill>
-                  <a:srgbClr val="FFFFFF"/>
-                </a:solidFill>
-                <a:latin typeface="Calibri"/>
-              </a:rPr>
-              <a:t>Integration Tests  (Supertest + Express)</a:t>
-            </a:r>
-          </a:p>
-        </p:txBody>
-      </p:sp>
-      <p:sp>
-        <p:nvSpPr>
-          <p:cNvPr id="45" name="TextBox 44"/>
-          <p:cNvSpPr txBox="1"/>
-          <p:nvPr/>
-        </p:nvSpPr>
-        <p:spPr>
-          <a:xfrm>
-            <a:off x="6309360" y="3246120"/>
-            <a:ext cx="5303520" cy="320040"/>
-          </a:xfrm>
-          <a:prstGeom prst="rect">
-            <a:avLst/>
-          </a:prstGeom>
-          <a:noFill/>
-        </p:spPr>
-        <p:txBody>
-          <a:bodyPr wrap="square">
-            <a:spAutoFit/>
-          </a:bodyPr>
-          <a:lstStyle/>
-          <a:p>
-            <a:pPr algn="l"/>
-            <a:r>
-              <a:rPr sz="1000" b="1" i="0">
-                <a:solidFill>
-                  <a:srgbClr val="C9A84C"/>
-                </a:solidFill>
-                <a:latin typeface="Calibri"/>
-              </a:rPr>
-              <a:t>auth.test.js</a:t>
-            </a:r>
-          </a:p>
-        </p:txBody>
-      </p:sp>
-      <p:sp>
-        <p:nvSpPr>
-          <p:cNvPr id="46" name="TextBox 45"/>
-          <p:cNvSpPr txBox="1"/>
-          <p:nvPr/>
-        </p:nvSpPr>
-        <p:spPr>
-          <a:xfrm>
-            <a:off x="6400800" y="3566160"/>
-            <a:ext cx="5120640" cy="292608"/>
-          </a:xfrm>
-          <a:prstGeom prst="rect">
-            <a:avLst/>
-          </a:prstGeom>
-          <a:noFill/>
-        </p:spPr>
-        <p:txBody>
-          <a:bodyPr wrap="square">
-            <a:spAutoFit/>
-          </a:bodyPr>
-          <a:lstStyle/>
-          <a:p>
-            <a:pPr algn="l"/>
-            <a:r>
-              <a:rPr sz="900" b="0" i="0">
-                <a:solidFill>
-                  <a:srgbClr val="5C6370"/>
-                </a:solidFill>
-                <a:latin typeface="Calibri"/>
-              </a:rPr>
-              <a:t>✓  should register a new mentee</a:t>
-            </a:r>
-          </a:p>
-        </p:txBody>
-      </p:sp>
-      <p:sp>
-        <p:nvSpPr>
-          <p:cNvPr id="47" name="TextBox 46"/>
-          <p:cNvSpPr txBox="1"/>
-          <p:nvPr/>
-        </p:nvSpPr>
-        <p:spPr>
-          <a:xfrm>
-            <a:off x="6400800" y="3840480"/>
-            <a:ext cx="5120640" cy="292608"/>
-          </a:xfrm>
-          <a:prstGeom prst="rect">
-            <a:avLst/>
-          </a:prstGeom>
-          <a:noFill/>
-        </p:spPr>
-        <p:txBody>
-          <a:bodyPr wrap="square">
-            <a:spAutoFit/>
-          </a:bodyPr>
-          <a:lstStyle/>
-          <a:p>
-            <a:pPr algn="l"/>
-            <a:r>
-              <a:rPr sz="900" b="0" i="0">
-                <a:solidFill>
-                  <a:srgbClr val="5C6370"/>
-                </a:solidFill>
-                <a:latin typeface="Calibri"/>
-              </a:rPr>
-              <a:t>✓  should reject duplicate email</a:t>
-            </a:r>
-          </a:p>
-        </p:txBody>
-      </p:sp>
-      <p:sp>
-        <p:nvSpPr>
-          <p:cNvPr id="48" name="TextBox 47"/>
-          <p:cNvSpPr txBox="1"/>
-          <p:nvPr/>
-        </p:nvSpPr>
-        <p:spPr>
-          <a:xfrm>
-            <a:off x="6400800" y="4114800"/>
-            <a:ext cx="5120640" cy="292608"/>
-          </a:xfrm>
-          <a:prstGeom prst="rect">
-            <a:avLst/>
-          </a:prstGeom>
-          <a:noFill/>
-        </p:spPr>
-        <p:txBody>
-          <a:bodyPr wrap="square">
-            <a:spAutoFit/>
-          </a:bodyPr>
-          <a:lstStyle/>
-          <a:p>
-            <a:pPr algn="l"/>
-            <a:r>
-              <a:rPr sz="900" b="0" i="0">
-                <a:solidFill>
-                  <a:srgbClr val="5C6370"/>
-                </a:solidFill>
-                <a:latin typeface="Calibri"/>
-              </a:rPr>
-              <a:t>✓  should reject wrong password</a:t>
-            </a:r>
-          </a:p>
-        </p:txBody>
-      </p:sp>
-      <p:sp>
-        <p:nvSpPr>
-          <p:cNvPr id="49" name="TextBox 48"/>
-          <p:cNvSpPr txBox="1"/>
-          <p:nvPr/>
-        </p:nvSpPr>
-        <p:spPr>
-          <a:xfrm>
-            <a:off x="6309360" y="4937760"/>
-            <a:ext cx="5303520" cy="320040"/>
-          </a:xfrm>
-          <a:prstGeom prst="rect">
-            <a:avLst/>
-          </a:prstGeom>
-          <a:noFill/>
-        </p:spPr>
-        <p:txBody>
-          <a:bodyPr wrap="square">
-            <a:spAutoFit/>
-          </a:bodyPr>
-          <a:lstStyle/>
-          <a:p>
-            <a:pPr algn="l"/>
-            <a:r>
-              <a:rPr sz="1000" b="1" i="0">
-                <a:solidFill>
-                  <a:srgbClr val="C9A84C"/>
-                </a:solidFill>
-                <a:latin typeface="Calibri"/>
-              </a:rPr>
-              <a:t>session.test.js</a:t>
-            </a:r>
-          </a:p>
-        </p:txBody>
-      </p:sp>
-      <p:sp>
-        <p:nvSpPr>
-          <p:cNvPr id="50" name="TextBox 49"/>
-          <p:cNvSpPr txBox="1"/>
-          <p:nvPr/>
-        </p:nvSpPr>
-        <p:spPr>
-          <a:xfrm>
-            <a:off x="6400800" y="5257800"/>
-            <a:ext cx="5120640" cy="292608"/>
-          </a:xfrm>
-          <a:prstGeom prst="rect">
-            <a:avLst/>
-          </a:prstGeom>
-          <a:noFill/>
-        </p:spPr>
-        <p:txBody>
-          <a:bodyPr wrap="square">
-            <a:spAutoFit/>
-          </a:bodyPr>
-          <a:lstStyle/>
-          <a:p>
-            <a:pPr algn="l"/>
-            <a:r>
-              <a:rPr sz="900" b="0" i="0">
-                <a:solidFill>
-                  <a:srgbClr val="5C6370"/>
-                </a:solidFill>
-                <a:latin typeface="Calibri"/>
-              </a:rPr>
-              <a:t>✓  authenticated mentee gets sessions</a:t>
-            </a:r>
-          </a:p>
-        </p:txBody>
-      </p:sp>
-      <p:sp>
-        <p:nvSpPr>
-          <p:cNvPr id="51" name="TextBox 50"/>
-          <p:cNvSpPr txBox="1"/>
-          <p:nvPr/>
-        </p:nvSpPr>
-        <p:spPr>
-          <a:xfrm>
-            <a:off x="6400800" y="5532120"/>
-            <a:ext cx="5120640" cy="292608"/>
-          </a:xfrm>
-          <a:prstGeom prst="rect">
-            <a:avLst/>
-          </a:prstGeom>
-          <a:noFill/>
-        </p:spPr>
-        <p:txBody>
-          <a:bodyPr wrap="square">
-            <a:spAutoFit/>
-          </a:bodyPr>
-          <a:lstStyle/>
-          <a:p>
-            <a:pPr algn="l"/>
-            <a:r>
-              <a:rPr sz="900" b="0" i="0">
-                <a:solidFill>
-                  <a:srgbClr val="5C6370"/>
-                </a:solidFill>
-                <a:latin typeface="Calibri"/>
-              </a:rPr>
-              <a:t>✓  unauthenticated request rejected (401)</a:t>
-            </a:r>
-          </a:p>
-        </p:txBody>
-      </p:sp>
-      <p:sp>
-        <p:nvSpPr>
-          <p:cNvPr id="52" name="Rectangle 51"/>
-          <p:cNvSpPr/>
-          <p:nvPr/>
-        </p:nvSpPr>
-        <p:spPr>
-          <a:xfrm>
-            <a:off x="6172200" y="5349240"/>
-            <a:ext cx="5577840" cy="1097280"/>
-          </a:xfrm>
-          <a:prstGeom prst="rect">
-            <a:avLst/>
-          </a:prstGeom>
-          <a:solidFill>
-            <a:srgbClr val="F0F8F0"/>
-          </a:solidFill>
-          <a:ln w="6350">
-            <a:solidFill>
-              <a:srgbClr val="E0E0E0"/>
-            </a:solidFill>
-          </a:ln>
-        </p:spPr>
-        <p:style>
-          <a:lnRef idx="1">
-            <a:schemeClr val="accent1"/>
-          </a:lnRef>
-          <a:fillRef idx="3">
-            <a:schemeClr val="accent1"/>
-          </a:fillRef>
-          <a:effectRef idx="2">
-            <a:schemeClr val="accent1"/>
-          </a:effectRef>
-          <a:fontRef idx="minor">
-            <a:schemeClr val="lt1"/>
-          </a:fontRef>
-        </p:style>
-        <p:txBody>
-          <a:bodyPr rtlCol="0" anchor="ctr"/>
-          <a:lstStyle/>
-          <a:p>
-            <a:pPr algn="ctr"/>
-            <a:endParaRPr/>
-          </a:p>
-        </p:txBody>
-      </p:sp>
-      <p:sp>
-        <p:nvSpPr>
-          <p:cNvPr id="53" name="TextBox 52"/>
-          <p:cNvSpPr txBox="1"/>
-          <p:nvPr/>
-        </p:nvSpPr>
-        <p:spPr>
-          <a:xfrm>
-            <a:off x="6309360" y="5440680"/>
-            <a:ext cx="5303520" cy="274320"/>
-          </a:xfrm>
-          <a:prstGeom prst="rect">
-            <a:avLst/>
-          </a:prstGeom>
-          <a:noFill/>
-        </p:spPr>
-        <p:txBody>
-          <a:bodyPr wrap="square">
-            <a:spAutoFit/>
-          </a:bodyPr>
-          <a:lstStyle/>
-          <a:p>
-            <a:pPr algn="l"/>
-            <a:r>
-              <a:rPr sz="900" b="0" i="0">
-                <a:solidFill>
-                  <a:srgbClr val="2D8C5E"/>
-                </a:solidFill>
-                <a:latin typeface="Consolas"/>
-              </a:rPr>
-              <a:t>$ npx jest tests/unit/ --verbose</a:t>
-            </a:r>
-          </a:p>
-        </p:txBody>
-      </p:sp>
-      <p:sp>
-        <p:nvSpPr>
-          <p:cNvPr id="54" name="TextBox 53"/>
-          <p:cNvSpPr txBox="1"/>
-          <p:nvPr/>
-        </p:nvSpPr>
-        <p:spPr>
-          <a:xfrm>
-            <a:off x="6309360" y="5715000"/>
-            <a:ext cx="5303520" cy="274320"/>
-          </a:xfrm>
-          <a:prstGeom prst="rect">
-            <a:avLst/>
-          </a:prstGeom>
-          <a:noFill/>
-        </p:spPr>
-        <p:txBody>
-          <a:bodyPr wrap="square">
-            <a:spAutoFit/>
-          </a:bodyPr>
-          <a:lstStyle/>
-          <a:p>
-            <a:pPr algn="l"/>
-            <a:r>
-              <a:rPr sz="900" b="0" i="0">
-                <a:solidFill>
-                  <a:srgbClr val="2D8C5E"/>
-                </a:solidFill>
-                <a:latin typeface="Consolas"/>
-              </a:rPr>
-              <a:t>$ npx jest tests/integration/ --verbose</a:t>
-            </a:r>
-          </a:p>
-        </p:txBody>
-      </p:sp>
-      <p:sp>
-        <p:nvSpPr>
-          <p:cNvPr id="55" name="TextBox 54"/>
-          <p:cNvSpPr txBox="1"/>
-          <p:nvPr/>
-        </p:nvSpPr>
-        <p:spPr>
-          <a:xfrm>
-            <a:off x="6309360" y="5989320"/>
-            <a:ext cx="5303520" cy="274320"/>
-          </a:xfrm>
-          <a:prstGeom prst="rect">
-            <a:avLst/>
-          </a:prstGeom>
-          <a:noFill/>
-        </p:spPr>
-        <p:txBody>
-          <a:bodyPr wrap="square">
-            <a:spAutoFit/>
-          </a:bodyPr>
-          <a:lstStyle/>
-          <a:p>
-            <a:pPr algn="l"/>
-            <a:r>
-              <a:rPr sz="900" b="0" i="0">
-                <a:solidFill>
-                  <a:srgbClr val="2D8C5E"/>
-                </a:solidFill>
-                <a:latin typeface="Consolas"/>
-              </a:rPr>
-              <a:t>$ npx jest --coverage</a:t>
-            </a:r>
-          </a:p>
-        </p:txBody>
-      </p:sp>
+      <p:pic>
+        <p:nvPicPr>
+          <p:cNvPr id="56" name="Picture 55">
+            <a:extLst>
+              <a:ext uri="{FF2B5EF4-FFF2-40B4-BE49-F238E27FC236}">
+                <a16:creationId xmlns:a16="http://schemas.microsoft.com/office/drawing/2014/main" id="{09F9C969-BD25-22D6-05DE-AA749196E9C1}"/>
+              </a:ext>
+            </a:extLst>
+          </p:cNvPr>
+          <p:cNvPicPr>
+            <a:picLocks noChangeAspect="1"/>
+          </p:cNvPicPr>
+          <p:nvPr/>
+        </p:nvPicPr>
+        <p:blipFill>
+          <a:blip r:embed="rId2"/>
+          <a:stretch>
+            <a:fillRect/>
+          </a:stretch>
+        </p:blipFill>
+        <p:spPr>
+          <a:xfrm>
+            <a:off x="457200" y="1172308"/>
+            <a:ext cx="11430000" cy="5685692"/>
+          </a:xfrm>
+          <a:prstGeom prst="rect">
+            <a:avLst/>
+          </a:prstGeom>
+        </p:spPr>
+      </p:pic>
     </p:spTree>
   </p:cSld>
   <p:clrMapOvr>
@@ -7145,7 +8277,453 @@
 </p:sld>
 </file>
 
-<file path=ppt/slides/slide12.xml><?xml version="1.0" encoding="utf-8"?>
+<file path=ppt/slides/slide13.xml><?xml version="1.0" encoding="utf-8"?>
+<p:sld xmlns:a="http://schemas.openxmlformats.org/drawingml/2006/main" xmlns:r="http://schemas.openxmlformats.org/officeDocument/2006/relationships" xmlns:p="http://schemas.openxmlformats.org/presentationml/2006/main">
+  <p:cSld>
+    <p:bg>
+      <p:bgPr>
+        <a:solidFill>
+          <a:srgbClr val="F4F6F9"/>
+        </a:solidFill>
+        <a:effectLst/>
+      </p:bgPr>
+    </p:bg>
+    <p:spTree>
+      <p:nvGrpSpPr>
+        <p:cNvPr id="1" name="">
+          <a:extLst>
+            <a:ext uri="{FF2B5EF4-FFF2-40B4-BE49-F238E27FC236}">
+              <a16:creationId xmlns:a16="http://schemas.microsoft.com/office/drawing/2014/main" id="{00BE0175-4EFE-D7CE-FA64-D9D59C3B16A8}"/>
+            </a:ext>
+          </a:extLst>
+        </p:cNvPr>
+        <p:cNvGrpSpPr/>
+        <p:nvPr/>
+      </p:nvGrpSpPr>
+      <p:grpSpPr>
+        <a:xfrm>
+          <a:off x="0" y="0"/>
+          <a:ext cx="0" cy="0"/>
+          <a:chOff x="0" y="0"/>
+          <a:chExt cx="0" cy="0"/>
+        </a:xfrm>
+      </p:grpSpPr>
+      <p:sp>
+        <p:nvSpPr>
+          <p:cNvPr id="2" name="Rectangle 1">
+            <a:extLst>
+              <a:ext uri="{FF2B5EF4-FFF2-40B4-BE49-F238E27FC236}">
+                <a16:creationId xmlns:a16="http://schemas.microsoft.com/office/drawing/2014/main" id="{60281D44-81C7-E993-CF76-9FBCFC93D96B}"/>
+              </a:ext>
+            </a:extLst>
+          </p:cNvPr>
+          <p:cNvSpPr/>
+          <p:nvPr/>
+        </p:nvSpPr>
+        <p:spPr>
+          <a:xfrm>
+            <a:off x="0" y="0"/>
+            <a:ext cx="12188952" cy="1097280"/>
+          </a:xfrm>
+          <a:prstGeom prst="rect">
+            <a:avLst/>
+          </a:prstGeom>
+          <a:solidFill>
+            <a:srgbClr val="0D1B2A"/>
+          </a:solidFill>
+          <a:ln>
+            <a:noFill/>
+          </a:ln>
+        </p:spPr>
+        <p:style>
+          <a:lnRef idx="1">
+            <a:schemeClr val="accent1"/>
+          </a:lnRef>
+          <a:fillRef idx="3">
+            <a:schemeClr val="accent1"/>
+          </a:fillRef>
+          <a:effectRef idx="2">
+            <a:schemeClr val="accent1"/>
+          </a:effectRef>
+          <a:fontRef idx="minor">
+            <a:schemeClr val="lt1"/>
+          </a:fontRef>
+        </p:style>
+        <p:txBody>
+          <a:bodyPr rtlCol="0" anchor="ctr"/>
+          <a:lstStyle/>
+          <a:p>
+            <a:pPr algn="ctr"/>
+            <a:endParaRPr/>
+          </a:p>
+        </p:txBody>
+      </p:sp>
+      <p:sp>
+        <p:nvSpPr>
+          <p:cNvPr id="3" name="TextBox 2">
+            <a:extLst>
+              <a:ext uri="{FF2B5EF4-FFF2-40B4-BE49-F238E27FC236}">
+                <a16:creationId xmlns:a16="http://schemas.microsoft.com/office/drawing/2014/main" id="{73AF699C-0C7F-3171-A189-05B0A66ACCD0}"/>
+              </a:ext>
+            </a:extLst>
+          </p:cNvPr>
+          <p:cNvSpPr txBox="1"/>
+          <p:nvPr/>
+        </p:nvSpPr>
+        <p:spPr>
+          <a:xfrm>
+            <a:off x="457200" y="292608"/>
+            <a:ext cx="10972800" cy="640080"/>
+          </a:xfrm>
+          <a:prstGeom prst="rect">
+            <a:avLst/>
+          </a:prstGeom>
+          <a:noFill/>
+        </p:spPr>
+        <p:txBody>
+          <a:bodyPr wrap="square">
+            <a:spAutoFit/>
+          </a:bodyPr>
+          <a:lstStyle/>
+          <a:p>
+            <a:pPr algn="l"/>
+            <a:r>
+              <a:rPr sz="2400" b="1" i="0">
+                <a:solidFill>
+                  <a:srgbClr val="FFFFFF"/>
+                </a:solidFill>
+                <a:latin typeface="Georgia"/>
+              </a:rPr>
+              <a:t>Phase 4 · Software Testing</a:t>
+            </a:r>
+          </a:p>
+        </p:txBody>
+      </p:sp>
+      <p:sp>
+        <p:nvSpPr>
+          <p:cNvPr id="4" name="Rounded Rectangle 3">
+            <a:extLst>
+              <a:ext uri="{FF2B5EF4-FFF2-40B4-BE49-F238E27FC236}">
+                <a16:creationId xmlns:a16="http://schemas.microsoft.com/office/drawing/2014/main" id="{33D94C8D-94F4-6286-2C7D-55323A662C26}"/>
+              </a:ext>
+            </a:extLst>
+          </p:cNvPr>
+          <p:cNvSpPr/>
+          <p:nvPr/>
+        </p:nvSpPr>
+        <p:spPr>
+          <a:xfrm>
+            <a:off x="457200" y="804672"/>
+            <a:ext cx="1645920" cy="256032"/>
+          </a:xfrm>
+          <a:prstGeom prst="roundRect">
+            <a:avLst/>
+          </a:prstGeom>
+          <a:solidFill>
+            <a:srgbClr val="C9A84C"/>
+          </a:solidFill>
+          <a:ln>
+            <a:noFill/>
+          </a:ln>
+        </p:spPr>
+        <p:style>
+          <a:lnRef idx="1">
+            <a:schemeClr val="accent1"/>
+          </a:lnRef>
+          <a:fillRef idx="3">
+            <a:schemeClr val="accent1"/>
+          </a:fillRef>
+          <a:effectRef idx="2">
+            <a:schemeClr val="accent1"/>
+          </a:effectRef>
+          <a:fontRef idx="minor">
+            <a:schemeClr val="lt1"/>
+          </a:fontRef>
+        </p:style>
+        <p:txBody>
+          <a:bodyPr wrap="none" rtlCol="0" anchor="ctr"/>
+          <a:lstStyle/>
+          <a:p>
+            <a:pPr algn="ctr"/>
+            <a:r>
+              <a:rPr sz="900" b="1">
+                <a:solidFill>
+                  <a:srgbClr val="0D1B2A"/>
+                </a:solidFill>
+                <a:latin typeface="Calibri"/>
+              </a:rPr>
+              <a:t>PHASE 4 — TESTING</a:t>
+            </a:r>
+          </a:p>
+        </p:txBody>
+      </p:sp>
+      <p:pic>
+        <p:nvPicPr>
+          <p:cNvPr id="5" name="Picture 4">
+            <a:extLst>
+              <a:ext uri="{FF2B5EF4-FFF2-40B4-BE49-F238E27FC236}">
+                <a16:creationId xmlns:a16="http://schemas.microsoft.com/office/drawing/2014/main" id="{3C97CF68-A25D-380E-4035-04B84B83E053}"/>
+              </a:ext>
+            </a:extLst>
+          </p:cNvPr>
+          <p:cNvPicPr>
+            <a:picLocks noChangeAspect="1"/>
+          </p:cNvPicPr>
+          <p:nvPr/>
+        </p:nvPicPr>
+        <p:blipFill>
+          <a:blip r:embed="rId2"/>
+          <a:stretch>
+            <a:fillRect/>
+          </a:stretch>
+        </p:blipFill>
+        <p:spPr>
+          <a:xfrm>
+            <a:off x="304800" y="1225295"/>
+            <a:ext cx="11125200" cy="5568543"/>
+          </a:xfrm>
+          <a:prstGeom prst="rect">
+            <a:avLst/>
+          </a:prstGeom>
+        </p:spPr>
+      </p:pic>
+    </p:spTree>
+    <p:extLst>
+      <p:ext uri="{BB962C8B-B14F-4D97-AF65-F5344CB8AC3E}">
+        <p14:creationId xmlns:p14="http://schemas.microsoft.com/office/powerpoint/2010/main" val="2596984838"/>
+      </p:ext>
+    </p:extLst>
+  </p:cSld>
+  <p:clrMapOvr>
+    <a:masterClrMapping/>
+  </p:clrMapOvr>
+</p:sld>
+</file>
+
+<file path=ppt/slides/slide14.xml><?xml version="1.0" encoding="utf-8"?>
+<p:sld xmlns:a="http://schemas.openxmlformats.org/drawingml/2006/main" xmlns:r="http://schemas.openxmlformats.org/officeDocument/2006/relationships" xmlns:p="http://schemas.openxmlformats.org/presentationml/2006/main">
+  <p:cSld>
+    <p:bg>
+      <p:bgPr>
+        <a:solidFill>
+          <a:srgbClr val="F4F6F9"/>
+        </a:solidFill>
+        <a:effectLst/>
+      </p:bgPr>
+    </p:bg>
+    <p:spTree>
+      <p:nvGrpSpPr>
+        <p:cNvPr id="1" name="">
+          <a:extLst>
+            <a:ext uri="{FF2B5EF4-FFF2-40B4-BE49-F238E27FC236}">
+              <a16:creationId xmlns:a16="http://schemas.microsoft.com/office/drawing/2014/main" id="{2476B934-B759-184A-DB3E-9B2CB68A5E0F}"/>
+            </a:ext>
+          </a:extLst>
+        </p:cNvPr>
+        <p:cNvGrpSpPr/>
+        <p:nvPr/>
+      </p:nvGrpSpPr>
+      <p:grpSpPr>
+        <a:xfrm>
+          <a:off x="0" y="0"/>
+          <a:ext cx="0" cy="0"/>
+          <a:chOff x="0" y="0"/>
+          <a:chExt cx="0" cy="0"/>
+        </a:xfrm>
+      </p:grpSpPr>
+      <p:sp>
+        <p:nvSpPr>
+          <p:cNvPr id="2" name="Rectangle 1">
+            <a:extLst>
+              <a:ext uri="{FF2B5EF4-FFF2-40B4-BE49-F238E27FC236}">
+                <a16:creationId xmlns:a16="http://schemas.microsoft.com/office/drawing/2014/main" id="{E9C40A5E-AF4C-A068-30BF-8CAF0BA854C9}"/>
+              </a:ext>
+            </a:extLst>
+          </p:cNvPr>
+          <p:cNvSpPr/>
+          <p:nvPr/>
+        </p:nvSpPr>
+        <p:spPr>
+          <a:xfrm>
+            <a:off x="0" y="0"/>
+            <a:ext cx="12188952" cy="1097280"/>
+          </a:xfrm>
+          <a:prstGeom prst="rect">
+            <a:avLst/>
+          </a:prstGeom>
+          <a:solidFill>
+            <a:srgbClr val="0D1B2A"/>
+          </a:solidFill>
+          <a:ln>
+            <a:noFill/>
+          </a:ln>
+        </p:spPr>
+        <p:style>
+          <a:lnRef idx="1">
+            <a:schemeClr val="accent1"/>
+          </a:lnRef>
+          <a:fillRef idx="3">
+            <a:schemeClr val="accent1"/>
+          </a:fillRef>
+          <a:effectRef idx="2">
+            <a:schemeClr val="accent1"/>
+          </a:effectRef>
+          <a:fontRef idx="minor">
+            <a:schemeClr val="lt1"/>
+          </a:fontRef>
+        </p:style>
+        <p:txBody>
+          <a:bodyPr rtlCol="0" anchor="ctr"/>
+          <a:lstStyle/>
+          <a:p>
+            <a:pPr algn="ctr"/>
+            <a:endParaRPr/>
+          </a:p>
+        </p:txBody>
+      </p:sp>
+      <p:sp>
+        <p:nvSpPr>
+          <p:cNvPr id="3" name="TextBox 2">
+            <a:extLst>
+              <a:ext uri="{FF2B5EF4-FFF2-40B4-BE49-F238E27FC236}">
+                <a16:creationId xmlns:a16="http://schemas.microsoft.com/office/drawing/2014/main" id="{79F62C43-3910-208E-6057-6C3C7A1E186F}"/>
+              </a:ext>
+            </a:extLst>
+          </p:cNvPr>
+          <p:cNvSpPr txBox="1"/>
+          <p:nvPr/>
+        </p:nvSpPr>
+        <p:spPr>
+          <a:xfrm>
+            <a:off x="457200" y="292608"/>
+            <a:ext cx="10972800" cy="640080"/>
+          </a:xfrm>
+          <a:prstGeom prst="rect">
+            <a:avLst/>
+          </a:prstGeom>
+          <a:noFill/>
+        </p:spPr>
+        <p:txBody>
+          <a:bodyPr wrap="square">
+            <a:spAutoFit/>
+          </a:bodyPr>
+          <a:lstStyle/>
+          <a:p>
+            <a:pPr algn="l"/>
+            <a:r>
+              <a:rPr sz="2400" b="1" i="0">
+                <a:solidFill>
+                  <a:srgbClr val="FFFFFF"/>
+                </a:solidFill>
+                <a:latin typeface="Georgia"/>
+              </a:rPr>
+              <a:t>Phase 4 · Software Testing</a:t>
+            </a:r>
+          </a:p>
+        </p:txBody>
+      </p:sp>
+      <p:sp>
+        <p:nvSpPr>
+          <p:cNvPr id="4" name="Rounded Rectangle 3">
+            <a:extLst>
+              <a:ext uri="{FF2B5EF4-FFF2-40B4-BE49-F238E27FC236}">
+                <a16:creationId xmlns:a16="http://schemas.microsoft.com/office/drawing/2014/main" id="{AA36C309-D234-1850-92DC-8BB5CCD70620}"/>
+              </a:ext>
+            </a:extLst>
+          </p:cNvPr>
+          <p:cNvSpPr/>
+          <p:nvPr/>
+        </p:nvSpPr>
+        <p:spPr>
+          <a:xfrm>
+            <a:off x="457200" y="804672"/>
+            <a:ext cx="1645920" cy="256032"/>
+          </a:xfrm>
+          <a:prstGeom prst="roundRect">
+            <a:avLst/>
+          </a:prstGeom>
+          <a:solidFill>
+            <a:srgbClr val="C9A84C"/>
+          </a:solidFill>
+          <a:ln>
+            <a:noFill/>
+          </a:ln>
+        </p:spPr>
+        <p:style>
+          <a:lnRef idx="1">
+            <a:schemeClr val="accent1"/>
+          </a:lnRef>
+          <a:fillRef idx="3">
+            <a:schemeClr val="accent1"/>
+          </a:fillRef>
+          <a:effectRef idx="2">
+            <a:schemeClr val="accent1"/>
+          </a:effectRef>
+          <a:fontRef idx="minor">
+            <a:schemeClr val="lt1"/>
+          </a:fontRef>
+        </p:style>
+        <p:txBody>
+          <a:bodyPr wrap="none" rtlCol="0" anchor="ctr"/>
+          <a:lstStyle/>
+          <a:p>
+            <a:pPr algn="ctr"/>
+            <a:r>
+              <a:rPr sz="900" b="1">
+                <a:solidFill>
+                  <a:srgbClr val="0D1B2A"/>
+                </a:solidFill>
+                <a:latin typeface="Calibri"/>
+              </a:rPr>
+              <a:t>PHASE 4 — TESTING</a:t>
+            </a:r>
+          </a:p>
+        </p:txBody>
+      </p:sp>
+      <p:pic>
+        <p:nvPicPr>
+          <p:cNvPr id="5" name="Picture 4">
+            <a:extLst>
+              <a:ext uri="{FF2B5EF4-FFF2-40B4-BE49-F238E27FC236}">
+                <a16:creationId xmlns:a16="http://schemas.microsoft.com/office/drawing/2014/main" id="{D04AE490-EAF7-B451-77E7-AF995A11C029}"/>
+              </a:ext>
+            </a:extLst>
+          </p:cNvPr>
+          <p:cNvPicPr>
+            <a:picLocks noChangeAspect="1"/>
+          </p:cNvPicPr>
+          <p:nvPr/>
+        </p:nvPicPr>
+        <p:blipFill>
+          <a:blip r:embed="rId2"/>
+          <a:stretch>
+            <a:fillRect/>
+          </a:stretch>
+        </p:blipFill>
+        <p:spPr>
+          <a:xfrm>
+            <a:off x="-1" y="1225295"/>
+            <a:ext cx="12188825" cy="5573523"/>
+          </a:xfrm>
+          <a:prstGeom prst="rect">
+            <a:avLst/>
+          </a:prstGeom>
+        </p:spPr>
+      </p:pic>
+    </p:spTree>
+    <p:extLst>
+      <p:ext uri="{BB962C8B-B14F-4D97-AF65-F5344CB8AC3E}">
+        <p14:creationId xmlns:p14="http://schemas.microsoft.com/office/powerpoint/2010/main" val="821452375"/>
+      </p:ext>
+    </p:extLst>
+  </p:cSld>
+  <p:clrMapOvr>
+    <a:masterClrMapping/>
+  </p:clrMapOvr>
+</p:sld>
+</file>
+
+<file path=ppt/slides/slide15.xml><?xml version="1.0" encoding="utf-8"?>
 <p:sld xmlns:a="http://schemas.openxmlformats.org/drawingml/2006/main" xmlns:r="http://schemas.openxmlformats.org/officeDocument/2006/relationships" xmlns:p="http://schemas.openxmlformats.org/presentationml/2006/main">
   <p:cSld>
     <p:bg>
@@ -9168,7 +10746,7 @@
               </a:spcAft>
             </a:pPr>
             <a:r>
-              <a:rPr sz="1200" b="0">
+              <a:rPr sz="1200" b="0" dirty="0">
                 <a:solidFill>
                   <a:srgbClr val="0D1B2A"/>
                 </a:solidFill>
@@ -9183,7 +10761,7 @@
                 <a:spcPts val="400"/>
               </a:spcAft>
             </a:pPr>
-            <a:endParaRPr sz="1200" b="0">
+            <a:endParaRPr sz="1200" b="0" dirty="0">
               <a:solidFill>
                 <a:srgbClr val="0D1B2A"/>
               </a:solidFill>
@@ -9197,7 +10775,7 @@
               </a:spcAft>
             </a:pPr>
             <a:r>
-              <a:rPr sz="1200" b="1">
+              <a:rPr sz="1200" b="1" dirty="0">
                 <a:solidFill>
                   <a:srgbClr val="0D1B2A"/>
                 </a:solidFill>
@@ -9213,7 +10791,7 @@
               </a:spcAft>
             </a:pPr>
             <a:r>
-              <a:rPr sz="1200" b="0">
+              <a:rPr sz="1200" b="0" dirty="0">
                 <a:solidFill>
                   <a:srgbClr val="5C6370"/>
                 </a:solidFill>
@@ -9229,7 +10807,7 @@
               </a:spcAft>
             </a:pPr>
             <a:r>
-              <a:rPr sz="1200" b="0">
+              <a:rPr sz="1200" b="0" dirty="0">
                 <a:solidFill>
                   <a:srgbClr val="5C6370"/>
                 </a:solidFill>
@@ -9245,7 +10823,7 @@
               </a:spcAft>
             </a:pPr>
             <a:r>
-              <a:rPr sz="1200" b="0">
+              <a:rPr sz="1200" b="0" dirty="0">
                 <a:solidFill>
                   <a:srgbClr val="5C6370"/>
                 </a:solidFill>
@@ -9260,7 +10838,7 @@
                 <a:spcPts val="400"/>
               </a:spcAft>
             </a:pPr>
-            <a:endParaRPr sz="1200" b="0">
+            <a:endParaRPr sz="1200" b="0" dirty="0">
               <a:solidFill>
                 <a:srgbClr val="5C6370"/>
               </a:solidFill>
@@ -9274,7 +10852,7 @@
               </a:spcAft>
             </a:pPr>
             <a:r>
-              <a:rPr sz="1200" b="1">
+              <a:rPr sz="1200" b="1" dirty="0">
                 <a:solidFill>
                   <a:srgbClr val="0D1B2A"/>
                 </a:solidFill>
@@ -9290,7 +10868,7 @@
               </a:spcAft>
             </a:pPr>
             <a:r>
-              <a:rPr sz="1200" b="0">
+              <a:rPr sz="1200" b="0" dirty="0">
                 <a:solidFill>
                   <a:srgbClr val="5C6370"/>
                 </a:solidFill>
@@ -9306,7 +10884,7 @@
               </a:spcAft>
             </a:pPr>
             <a:r>
-              <a:rPr sz="1200" b="0">
+              <a:rPr sz="1200" b="0" dirty="0">
                 <a:solidFill>
                   <a:srgbClr val="5C6370"/>
                 </a:solidFill>
@@ -9322,7 +10900,7 @@
               </a:spcAft>
             </a:pPr>
             <a:r>
-              <a:rPr sz="1200" b="0">
+              <a:rPr sz="1200" b="0" dirty="0">
                 <a:solidFill>
                   <a:srgbClr val="5C6370"/>
                 </a:solidFill>
@@ -9338,7 +10916,7 @@
               </a:spcAft>
             </a:pPr>
             <a:r>
-              <a:rPr sz="1200" b="0">
+              <a:rPr sz="1200" b="0" dirty="0">
                 <a:solidFill>
                   <a:srgbClr val="5C6370"/>
                 </a:solidFill>
@@ -9354,7 +10932,7 @@
               </a:spcAft>
             </a:pPr>
             <a:r>
-              <a:rPr sz="1200" b="0">
+              <a:rPr sz="1200" b="0" dirty="0">
                 <a:solidFill>
                   <a:srgbClr val="5C6370"/>
                 </a:solidFill>
@@ -10246,8 +11824,8 @@
         </p:blipFill>
         <p:spPr>
           <a:xfrm>
-            <a:off x="4285310" y="1060704"/>
-            <a:ext cx="3618204" cy="5797296"/>
+            <a:off x="4285310" y="1097280"/>
+            <a:ext cx="3618204" cy="5760720"/>
           </a:xfrm>
           <a:prstGeom prst="rect">
             <a:avLst/>
@@ -10724,8 +12302,8 @@
         </p:blipFill>
         <p:spPr>
           <a:xfrm>
-            <a:off x="2694087" y="1097280"/>
-            <a:ext cx="6800651" cy="5760720"/>
+            <a:off x="2694087" y="1120140"/>
+            <a:ext cx="6800651" cy="5737860"/>
           </a:xfrm>
           <a:prstGeom prst="rect">
             <a:avLst/>

--- a/docs/AUCA_Mentorship_Portal.pptx
+++ b/docs/AUCA_Mentorship_Portal.pptx
@@ -5118,7 +5118,7 @@
           <a:p>
             <a:pPr algn="l"/>
             <a:r>
-              <a:rPr sz="2400" b="1" i="0">
+              <a:rPr sz="2400" b="1" i="0" dirty="0">
                 <a:solidFill>
                   <a:srgbClr val="FFFFFF"/>
                 </a:solidFill>
